--- a/ppt-generation-enterprise/workspace/某消费电子客户-智能售后服务闭环/某消费电子客户-智能售后服务闭环方案.pptx
+++ b/ppt-generation-enterprise/workspace/某消费电子客户-智能售后服务闭环/某消费电子客户-智能售后服务闭环方案.pptx
@@ -4,20 +4,23 @@
   <p:sldMasterIdLst>
     <p:sldMasterId id="2147483648" r:id="rId1"/>
   </p:sldMasterIdLst>
+  <p:notesMasterIdLst>
+    <p:notesMasterId r:id="rId13"/>
+  </p:notesMasterIdLst>
   <p:sldIdLst>
-    <p:sldId id="256" r:id="rId7"/>
-    <p:sldId id="257" r:id="rId9"/>
-    <p:sldId id="258" r:id="rId10"/>
-    <p:sldId id="259" r:id="rId11"/>
-    <p:sldId id="260" r:id="rId12"/>
-    <p:sldId id="261" r:id="rId13"/>
-    <p:sldId id="262" r:id="rId14"/>
-    <p:sldId id="263" r:id="rId15"/>
-    <p:sldId id="264" r:id="rId16"/>
-    <p:sldId id="265" r:id="rId17"/>
-    <p:sldId id="266" r:id="rId18"/>
+    <p:sldId id="256" r:id="rId2"/>
+    <p:sldId id="258" r:id="rId3"/>
+    <p:sldId id="257" r:id="rId4"/>
+    <p:sldId id="259" r:id="rId5"/>
+    <p:sldId id="260" r:id="rId6"/>
+    <p:sldId id="261" r:id="rId7"/>
+    <p:sldId id="262" r:id="rId8"/>
+    <p:sldId id="263" r:id="rId9"/>
+    <p:sldId id="264" r:id="rId10"/>
+    <p:sldId id="265" r:id="rId11"/>
+    <p:sldId id="266" r:id="rId12"/>
   </p:sldIdLst>
-  <p:sldSz cx="12191695" cy="6858000" type="screen4x3"/>
+  <p:sldSz cx="12192000" cy="6858000"/>
   <p:notesSz cx="6858000" cy="9144000"/>
   <p:defaultTextStyle>
     <a:defPPr>
@@ -114,11 +117,27 @@
       </a:defRPr>
     </a:lvl9pPr>
   </p:defaultTextStyle>
+  <p:extLst>
+    <p:ext uri="{EFAFB233-063F-42B5-8137-9DF3F51BA10A}">
+      <p15:sldGuideLst xmlns:p15="http://schemas.microsoft.com/office/powerpoint/2012/main">
+        <p15:guide id="1" orient="horz" pos="2160">
+          <p15:clr>
+            <a:srgbClr val="A4A3A4"/>
+          </p15:clr>
+        </p15:guide>
+        <p15:guide id="2" pos="2880">
+          <p15:clr>
+            <a:srgbClr val="A4A3A4"/>
+          </p15:clr>
+        </p15:guide>
+      </p15:sldGuideLst>
+    </p:ext>
+  </p:extLst>
 </p:presentation>
 </file>
 
 <file path=ppt/notesMasters/notesMaster1.xml><?xml version="1.0" encoding="utf-8"?>
-<p:notesMaster xmlns:a="http://schemas.openxmlformats.org/drawingml/2006/main" xmlns:p="http://schemas.openxmlformats.org/presentationml/2006/main" xmlns:r="http://schemas.openxmlformats.org/officeDocument/2006/relationships">
+<p:notesMaster xmlns:a="http://schemas.openxmlformats.org/drawingml/2006/main" xmlns:r="http://schemas.openxmlformats.org/officeDocument/2006/relationships" xmlns:p="http://schemas.openxmlformats.org/presentationml/2006/main">
   <p:cSld>
     <p:bg>
       <p:bgRef idx="1001">
@@ -139,241 +158,16 @@
           <a:chExt cx="0" cy="0"/>
         </a:xfrm>
       </p:grpSpPr>
-      <p:sp>
-        <p:nvSpPr>
-          <p:cNvPr id="2" name="Header Placeholder 1"/>
-          <p:cNvSpPr>
-            <a:spLocks noGrp="1"/>
-          </p:cNvSpPr>
-          <p:nvPr>
-            <p:ph type="hdr" sz="quarter"/>
-          </p:nvPr>
-        </p:nvSpPr>
-        <p:spPr>
-          <a:xfrm>
-            <a:off x="0" y="0"/>
-            <a:ext cx="2971800" cy="457200"/>
-          </a:xfrm>
-          <a:prstGeom prst="rect">
-            <a:avLst/>
-          </a:prstGeom>
-        </p:spPr>
-        <p:txBody>
-          <a:bodyPr vert="horz" lIns="91440" tIns="45720" rIns="91440" bIns="45720" rtlCol="0"/>
-          <a:lstStyle>
-            <a:lvl1pPr algn="l">
-              <a:defRPr sz="1200"/>
-            </a:lvl1pPr>
-          </a:lstStyle>
-          <a:p>
-            <a:endParaRPr lang="en-US"/>
-          </a:p>
-        </p:txBody>
-      </p:sp>
-      <p:sp>
-        <p:nvSpPr>
-          <p:cNvPr id="3" name="Date Placeholder 2"/>
-          <p:cNvSpPr>
-            <a:spLocks noGrp="1"/>
-          </p:cNvSpPr>
-          <p:nvPr>
-            <p:ph type="dt" idx="1"/>
-          </p:nvPr>
-        </p:nvSpPr>
-        <p:spPr>
-          <a:xfrm>
-            <a:off x="3884613" y="0"/>
-            <a:ext cx="2971800" cy="457200"/>
-          </a:xfrm>
-          <a:prstGeom prst="rect">
-            <a:avLst/>
-          </a:prstGeom>
-        </p:spPr>
-        <p:txBody>
-          <a:bodyPr vert="horz" lIns="91440" tIns="45720" rIns="91440" bIns="45720" rtlCol="0"/>
-          <a:lstStyle>
-            <a:lvl1pPr algn="r">
-              <a:defRPr sz="1200"/>
-            </a:lvl1pPr>
-          </a:lstStyle>
-          <a:p>
-            <a:fld id="{0F89C1C7-3DCD-1040-A9CF-14679D8B5DDD}" type="datetimeFigureOut">
-              <a:rPr lang="en-US" smtClean="0"/>
-              <a:t>10/17/16</a:t>
-            </a:fld>
-            <a:endParaRPr lang="en-US"/>
-          </a:p>
-        </p:txBody>
-      </p:sp>
-      <p:sp>
-        <p:nvSpPr>
-          <p:cNvPr id="4" name="Slide Image Placeholder 3"/>
-          <p:cNvSpPr>
-            <a:spLocks noGrp="1" noRot="1" noChangeAspect="1"/>
-          </p:cNvSpPr>
-          <p:nvPr>
-            <p:ph type="sldImg" idx="2"/>
-          </p:nvPr>
-        </p:nvSpPr>
-        <p:spPr>
-          <a:xfrm>
-            <a:off x="1143000" y="685800"/>
-            <a:ext cx="4572000" cy="3429000"/>
-          </a:xfrm>
-          <a:prstGeom prst="rect">
-            <a:avLst/>
-          </a:prstGeom>
-          <a:noFill/>
-          <a:ln w="12700">
-            <a:solidFill>
-              <a:prstClr val="black"/>
-            </a:solidFill>
-          </a:ln>
-        </p:spPr>
-        <p:txBody>
-          <a:bodyPr vert="horz" lIns="91440" tIns="45720" rIns="91440" bIns="45720" rtlCol="0" anchor="ctr"/>
-          <a:lstStyle/>
-          <a:p>
-            <a:endParaRPr lang="en-US"/>
-          </a:p>
-        </p:txBody>
-      </p:sp>
-      <p:sp>
-        <p:nvSpPr>
-          <p:cNvPr id="5" name="Notes Placeholder 4"/>
-          <p:cNvSpPr>
-            <a:spLocks noGrp="1"/>
-          </p:cNvSpPr>
-          <p:nvPr>
-            <p:ph type="body" sz="quarter" idx="3"/>
-          </p:nvPr>
-        </p:nvSpPr>
-        <p:spPr>
-          <a:xfrm>
-            <a:off x="685800" y="4343400"/>
-            <a:ext cx="5486400" cy="4114800"/>
-          </a:xfrm>
-          <a:prstGeom prst="rect">
-            <a:avLst/>
-          </a:prstGeom>
-        </p:spPr>
-        <p:txBody>
-          <a:bodyPr vert="horz" lIns="91440" tIns="45720" rIns="91440" bIns="45720" rtlCol="0"/>
-          <a:lstStyle/>
-          <a:p>
-            <a:pPr lvl="0"/>
-            <a:r>
-              <a:rPr lang="en-US" smtClean="0"/>
-              <a:t>Click to edit Master text styles</a:t>
-            </a:r>
-          </a:p>
-          <a:p>
-            <a:pPr lvl="1"/>
-            <a:r>
-              <a:rPr lang="en-US" smtClean="0"/>
-              <a:t>Second level</a:t>
-            </a:r>
-          </a:p>
-          <a:p>
-            <a:pPr lvl="2"/>
-            <a:r>
-              <a:rPr lang="en-US" smtClean="0"/>
-              <a:t>Third level</a:t>
-            </a:r>
-          </a:p>
-          <a:p>
-            <a:pPr lvl="3"/>
-            <a:r>
-              <a:rPr lang="en-US" smtClean="0"/>
-              <a:t>Fourth level</a:t>
-            </a:r>
-          </a:p>
-          <a:p>
-            <a:pPr lvl="4"/>
-            <a:r>
-              <a:rPr lang="en-US" smtClean="0"/>
-              <a:t>Fifth level</a:t>
-            </a:r>
-            <a:endParaRPr lang="en-US"/>
-          </a:p>
-        </p:txBody>
-      </p:sp>
-      <p:sp>
-        <p:nvSpPr>
-          <p:cNvPr id="6" name="Footer Placeholder 5"/>
-          <p:cNvSpPr>
-            <a:spLocks noGrp="1"/>
-          </p:cNvSpPr>
-          <p:nvPr>
-            <p:ph type="ftr" sz="quarter" idx="4"/>
-          </p:nvPr>
-        </p:nvSpPr>
-        <p:spPr>
-          <a:xfrm>
-            <a:off x="0" y="8685213"/>
-            <a:ext cx="2971800" cy="457200"/>
-          </a:xfrm>
-          <a:prstGeom prst="rect">
-            <a:avLst/>
-          </a:prstGeom>
-        </p:spPr>
-        <p:txBody>
-          <a:bodyPr vert="horz" lIns="91440" tIns="45720" rIns="91440" bIns="45720" rtlCol="0" anchor="b"/>
-          <a:lstStyle>
-            <a:lvl1pPr algn="l">
-              <a:defRPr sz="1200"/>
-            </a:lvl1pPr>
-          </a:lstStyle>
-          <a:p>
-            <a:endParaRPr lang="en-US"/>
-          </a:p>
-        </p:txBody>
-      </p:sp>
-      <p:sp>
-        <p:nvSpPr>
-          <p:cNvPr id="7" name="Slide Number Placeholder 6"/>
-          <p:cNvSpPr>
-            <a:spLocks noGrp="1"/>
-          </p:cNvSpPr>
-          <p:nvPr>
-            <p:ph type="sldNum" sz="quarter" idx="5"/>
-          </p:nvPr>
-        </p:nvSpPr>
-        <p:spPr>
-          <a:xfrm>
-            <a:off x="3884613" y="8685213"/>
-            <a:ext cx="2971800" cy="457200"/>
-          </a:xfrm>
-          <a:prstGeom prst="rect">
-            <a:avLst/>
-          </a:prstGeom>
-        </p:spPr>
-        <p:txBody>
-          <a:bodyPr vert="horz" lIns="91440" tIns="45720" rIns="91440" bIns="45720" rtlCol="0" anchor="b"/>
-          <a:lstStyle>
-            <a:lvl1pPr algn="r">
-              <a:defRPr sz="1200"/>
-            </a:lvl1pPr>
-          </a:lstStyle>
-          <a:p>
-            <a:fld id="{BB5E49A5-4136-284D-997B-48E1D791AD67}" type="slidenum">
-              <a:rPr lang="en-US" smtClean="0"/>
-              <a:t>‹#›</a:t>
-            </a:fld>
-            <a:endParaRPr lang="en-US"/>
-          </a:p>
-        </p:txBody>
-      </p:sp>
     </p:spTree>
     <p:extLst>
       <p:ext uri="{BB962C8B-B14F-4D97-AF65-F5344CB8AC3E}">
-        <p14:creationId xmlns:p14="http://schemas.microsoft.com/office/powerpoint/2010/main" val="2623252185"/>
+        <p14:creationId xmlns:p14="http://schemas.microsoft.com/office/powerpoint/2010/main" val="4022719338"/>
       </p:ext>
     </p:extLst>
   </p:cSld>
   <p:clrMap bg1="lt1" tx1="dk1" bg2="lt2" tx2="dk2" accent1="accent1" accent2="accent2" accent3="accent3" accent4="accent4" accent5="accent5" accent6="accent6" hlink="hlink" folHlink="folHlink"/>
   <p:notesStyle>
-    <a:lvl1pPr marL="0" algn="l" defTabSz="457200" rtl="0" eaLnBrk="1" latinLnBrk="0" hangingPunct="1">
+    <a:lvl1pPr marL="0" algn="l" defTabSz="914400" rtl="0" eaLnBrk="1" latinLnBrk="0" hangingPunct="1">
       <a:defRPr sz="1200" kern="1200">
         <a:solidFill>
           <a:schemeClr val="tx1"/>
@@ -383,7 +177,7 @@
         <a:cs typeface="+mn-cs"/>
       </a:defRPr>
     </a:lvl1pPr>
-    <a:lvl2pPr marL="457200" algn="l" defTabSz="457200" rtl="0" eaLnBrk="1" latinLnBrk="0" hangingPunct="1">
+    <a:lvl2pPr marL="457200" algn="l" defTabSz="914400" rtl="0" eaLnBrk="1" latinLnBrk="0" hangingPunct="1">
       <a:defRPr sz="1200" kern="1200">
         <a:solidFill>
           <a:schemeClr val="tx1"/>
@@ -393,7 +187,7 @@
         <a:cs typeface="+mn-cs"/>
       </a:defRPr>
     </a:lvl2pPr>
-    <a:lvl3pPr marL="914400" algn="l" defTabSz="457200" rtl="0" eaLnBrk="1" latinLnBrk="0" hangingPunct="1">
+    <a:lvl3pPr marL="914400" algn="l" defTabSz="914400" rtl="0" eaLnBrk="1" latinLnBrk="0" hangingPunct="1">
       <a:defRPr sz="1200" kern="1200">
         <a:solidFill>
           <a:schemeClr val="tx1"/>
@@ -403,7 +197,7 @@
         <a:cs typeface="+mn-cs"/>
       </a:defRPr>
     </a:lvl3pPr>
-    <a:lvl4pPr marL="1371600" algn="l" defTabSz="457200" rtl="0" eaLnBrk="1" latinLnBrk="0" hangingPunct="1">
+    <a:lvl4pPr marL="1371600" algn="l" defTabSz="914400" rtl="0" eaLnBrk="1" latinLnBrk="0" hangingPunct="1">
       <a:defRPr sz="1200" kern="1200">
         <a:solidFill>
           <a:schemeClr val="tx1"/>
@@ -413,7 +207,7 @@
         <a:cs typeface="+mn-cs"/>
       </a:defRPr>
     </a:lvl4pPr>
-    <a:lvl5pPr marL="1828800" algn="l" defTabSz="457200" rtl="0" eaLnBrk="1" latinLnBrk="0" hangingPunct="1">
+    <a:lvl5pPr marL="1828800" algn="l" defTabSz="914400" rtl="0" eaLnBrk="1" latinLnBrk="0" hangingPunct="1">
       <a:defRPr sz="1200" kern="1200">
         <a:solidFill>
           <a:schemeClr val="tx1"/>
@@ -423,7 +217,7 @@
         <a:cs typeface="+mn-cs"/>
       </a:defRPr>
     </a:lvl5pPr>
-    <a:lvl6pPr marL="2286000" algn="l" defTabSz="457200" rtl="0" eaLnBrk="1" latinLnBrk="0" hangingPunct="1">
+    <a:lvl6pPr marL="2286000" algn="l" defTabSz="914400" rtl="0" eaLnBrk="1" latinLnBrk="0" hangingPunct="1">
       <a:defRPr sz="1200" kern="1200">
         <a:solidFill>
           <a:schemeClr val="tx1"/>
@@ -433,7 +227,7 @@
         <a:cs typeface="+mn-cs"/>
       </a:defRPr>
     </a:lvl6pPr>
-    <a:lvl7pPr marL="2743200" algn="l" defTabSz="457200" rtl="0" eaLnBrk="1" latinLnBrk="0" hangingPunct="1">
+    <a:lvl7pPr marL="2743200" algn="l" defTabSz="914400" rtl="0" eaLnBrk="1" latinLnBrk="0" hangingPunct="1">
       <a:defRPr sz="1200" kern="1200">
         <a:solidFill>
           <a:schemeClr val="tx1"/>
@@ -443,7 +237,7 @@
         <a:cs typeface="+mn-cs"/>
       </a:defRPr>
     </a:lvl7pPr>
-    <a:lvl8pPr marL="3200400" algn="l" defTabSz="457200" rtl="0" eaLnBrk="1" latinLnBrk="0" hangingPunct="1">
+    <a:lvl8pPr marL="3200400" algn="l" defTabSz="914400" rtl="0" eaLnBrk="1" latinLnBrk="0" hangingPunct="1">
       <a:defRPr sz="1200" kern="1200">
         <a:solidFill>
           <a:schemeClr val="tx1"/>
@@ -453,7 +247,7 @@
         <a:cs typeface="+mn-cs"/>
       </a:defRPr>
     </a:lvl8pPr>
-    <a:lvl9pPr marL="3657600" algn="l" defTabSz="457200" rtl="0" eaLnBrk="1" latinLnBrk="0" hangingPunct="1">
+    <a:lvl9pPr marL="3657600" algn="l" defTabSz="914400" rtl="0" eaLnBrk="1" latinLnBrk="0" hangingPunct="1">
       <a:defRPr sz="1200" kern="1200">
         <a:solidFill>
           <a:schemeClr val="tx1"/>
@@ -468,7 +262,7 @@
 </file>
 
 <file path=ppt/notesSlides/notesSlide1.xml><?xml version="1.0" encoding="utf-8"?>
-<p:notes xmlns:a="http://schemas.openxmlformats.org/drawingml/2006/main" xmlns:p="http://schemas.openxmlformats.org/presentationml/2006/main" xmlns:r="http://schemas.openxmlformats.org/officeDocument/2006/relationships">
+<p:notes xmlns:a="http://schemas.openxmlformats.org/drawingml/2006/main" xmlns:r="http://schemas.openxmlformats.org/officeDocument/2006/relationships" xmlns:p="http://schemas.openxmlformats.org/presentationml/2006/main">
   <p:cSld>
     <p:spTree>
       <p:nvGrpSpPr>
@@ -488,7 +282,7 @@
         <p:nvSpPr>
           <p:cNvPr id="2" name="Slide Image Placeholder 1"/>
           <p:cNvSpPr>
-            <a:spLocks noGrp="1"/>
+            <a:spLocks noGrp="1" noRot="1" noChangeAspect="1"/>
           </p:cNvSpPr>
           <p:nvPr>
             <p:ph type="sldImg" idx="2"/>
@@ -503,7 +297,7 @@
             <a:spLocks noGrp="1"/>
           </p:cNvSpPr>
           <p:nvPr>
-            <p:ph type="body" idx="3" sz="quarter"/>
+            <p:ph type="body" sz="quarter" idx="3"/>
           </p:nvPr>
         </p:nvSpPr>
         <p:spPr/>
@@ -529,7 +323,7 @@
             <a:spLocks noGrp="1"/>
           </p:cNvSpPr>
           <p:nvPr>
-            <p:ph type="sldNum" idx="5" sz="quarter"/>
+            <p:ph type="sldNum" sz="quarter" idx="5"/>
           </p:nvPr>
         </p:nvSpPr>
         <p:spPr/>
@@ -543,7 +337,7 @@
 </file>
 
 <file path=ppt/notesSlides/notesSlide10.xml><?xml version="1.0" encoding="utf-8"?>
-<p:notes xmlns:a="http://schemas.openxmlformats.org/drawingml/2006/main" xmlns:p="http://schemas.openxmlformats.org/presentationml/2006/main" xmlns:r="http://schemas.openxmlformats.org/officeDocument/2006/relationships">
+<p:notes xmlns:a="http://schemas.openxmlformats.org/drawingml/2006/main" xmlns:r="http://schemas.openxmlformats.org/officeDocument/2006/relationships" xmlns:p="http://schemas.openxmlformats.org/presentationml/2006/main">
   <p:cSld>
     <p:spTree>
       <p:nvGrpSpPr>
@@ -563,7 +357,7 @@
         <p:nvSpPr>
           <p:cNvPr id="2" name="Slide Image Placeholder 1"/>
           <p:cNvSpPr>
-            <a:spLocks noGrp="1"/>
+            <a:spLocks noGrp="1" noRot="1" noChangeAspect="1"/>
           </p:cNvSpPr>
           <p:nvPr>
             <p:ph type="sldImg" idx="2"/>
@@ -578,7 +372,7 @@
             <a:spLocks noGrp="1"/>
           </p:cNvSpPr>
           <p:nvPr>
-            <p:ph type="body" idx="3" sz="quarter"/>
+            <p:ph type="body" sz="quarter" idx="3"/>
           </p:nvPr>
         </p:nvSpPr>
         <p:spPr/>
@@ -599,7 +393,7 @@
             <a:spLocks noGrp="1"/>
           </p:cNvSpPr>
           <p:nvPr>
-            <p:ph type="sldNum" idx="5" sz="quarter"/>
+            <p:ph type="sldNum" sz="quarter" idx="5"/>
           </p:nvPr>
         </p:nvSpPr>
         <p:spPr/>
@@ -613,7 +407,7 @@
 </file>
 
 <file path=ppt/notesSlides/notesSlide11.xml><?xml version="1.0" encoding="utf-8"?>
-<p:notes xmlns:a="http://schemas.openxmlformats.org/drawingml/2006/main" xmlns:p="http://schemas.openxmlformats.org/presentationml/2006/main" xmlns:r="http://schemas.openxmlformats.org/officeDocument/2006/relationships">
+<p:notes xmlns:a="http://schemas.openxmlformats.org/drawingml/2006/main" xmlns:r="http://schemas.openxmlformats.org/officeDocument/2006/relationships" xmlns:p="http://schemas.openxmlformats.org/presentationml/2006/main">
   <p:cSld>
     <p:spTree>
       <p:nvGrpSpPr>
@@ -633,7 +427,7 @@
         <p:nvSpPr>
           <p:cNvPr id="2" name="Slide Image Placeholder 1"/>
           <p:cNvSpPr>
-            <a:spLocks noGrp="1"/>
+            <a:spLocks noGrp="1" noRot="1" noChangeAspect="1"/>
           </p:cNvSpPr>
           <p:nvPr>
             <p:ph type="sldImg" idx="2"/>
@@ -648,7 +442,7 @@
             <a:spLocks noGrp="1"/>
           </p:cNvSpPr>
           <p:nvPr>
-            <p:ph type="body" idx="3" sz="quarter"/>
+            <p:ph type="body" sz="quarter" idx="3"/>
           </p:nvPr>
         </p:nvSpPr>
         <p:spPr/>
@@ -669,7 +463,7 @@
             <a:spLocks noGrp="1"/>
           </p:cNvSpPr>
           <p:nvPr>
-            <p:ph type="sldNum" idx="5" sz="quarter"/>
+            <p:ph type="sldNum" sz="quarter" idx="5"/>
           </p:nvPr>
         </p:nvSpPr>
         <p:spPr/>
@@ -683,7 +477,7 @@
 </file>
 
 <file path=ppt/notesSlides/notesSlide2.xml><?xml version="1.0" encoding="utf-8"?>
-<p:notes xmlns:a="http://schemas.openxmlformats.org/drawingml/2006/main" xmlns:p="http://schemas.openxmlformats.org/presentationml/2006/main" xmlns:r="http://schemas.openxmlformats.org/officeDocument/2006/relationships">
+<p:notes xmlns:a="http://schemas.openxmlformats.org/drawingml/2006/main" xmlns:r="http://schemas.openxmlformats.org/officeDocument/2006/relationships" xmlns:p="http://schemas.openxmlformats.org/presentationml/2006/main">
   <p:cSld>
     <p:spTree>
       <p:nvGrpSpPr>
@@ -703,7 +497,7 @@
         <p:nvSpPr>
           <p:cNvPr id="2" name="Slide Image Placeholder 1"/>
           <p:cNvSpPr>
-            <a:spLocks noGrp="1"/>
+            <a:spLocks noGrp="1" noRot="1" noChangeAspect="1"/>
           </p:cNvSpPr>
           <p:nvPr>
             <p:ph type="sldImg" idx="2"/>
@@ -718,7 +512,7 @@
             <a:spLocks noGrp="1"/>
           </p:cNvSpPr>
           <p:nvPr>
-            <p:ph type="body" idx="3" sz="quarter"/>
+            <p:ph type="body" sz="quarter" idx="3"/>
           </p:nvPr>
         </p:nvSpPr>
         <p:spPr/>
@@ -727,7 +521,7 @@
           <a:lstStyle/>
           <a:p>
             <a:r>
-              <a:t>Title: 业务机会与 Why Now</a:t>
+              <a:t>Title: 当前差距与优先痛点</a:t>
             </a:r>
           </a:p>
         </p:txBody>
@@ -739,7 +533,7 @@
             <a:spLocks noGrp="1"/>
           </p:cNvSpPr>
           <p:nvPr>
-            <p:ph type="sldNum" idx="5" sz="quarter"/>
+            <p:ph type="sldNum" sz="quarter" idx="5"/>
           </p:nvPr>
         </p:nvSpPr>
         <p:spPr/>
@@ -753,7 +547,7 @@
 </file>
 
 <file path=ppt/notesSlides/notesSlide3.xml><?xml version="1.0" encoding="utf-8"?>
-<p:notes xmlns:a="http://schemas.openxmlformats.org/drawingml/2006/main" xmlns:p="http://schemas.openxmlformats.org/presentationml/2006/main" xmlns:r="http://schemas.openxmlformats.org/officeDocument/2006/relationships">
+<p:notes xmlns:a="http://schemas.openxmlformats.org/drawingml/2006/main" xmlns:r="http://schemas.openxmlformats.org/officeDocument/2006/relationships" xmlns:p="http://schemas.openxmlformats.org/presentationml/2006/main">
   <p:cSld>
     <p:spTree>
       <p:nvGrpSpPr>
@@ -773,7 +567,7 @@
         <p:nvSpPr>
           <p:cNvPr id="2" name="Slide Image Placeholder 1"/>
           <p:cNvSpPr>
-            <a:spLocks noGrp="1"/>
+            <a:spLocks noGrp="1" noRot="1" noChangeAspect="1"/>
           </p:cNvSpPr>
           <p:nvPr>
             <p:ph type="sldImg" idx="2"/>
@@ -788,7 +582,7 @@
             <a:spLocks noGrp="1"/>
           </p:cNvSpPr>
           <p:nvPr>
-            <p:ph type="body" idx="3" sz="quarter"/>
+            <p:ph type="body" sz="quarter" idx="3"/>
           </p:nvPr>
         </p:nvSpPr>
         <p:spPr/>
@@ -797,7 +591,7 @@
           <a:lstStyle/>
           <a:p>
             <a:r>
-              <a:t>Title: 当前差距与优先痛点</a:t>
+              <a:t>Title: 业务机会与 Why Now</a:t>
             </a:r>
           </a:p>
         </p:txBody>
@@ -809,7 +603,7 @@
             <a:spLocks noGrp="1"/>
           </p:cNvSpPr>
           <p:nvPr>
-            <p:ph type="sldNum" idx="5" sz="quarter"/>
+            <p:ph type="sldNum" sz="quarter" idx="5"/>
           </p:nvPr>
         </p:nvSpPr>
         <p:spPr/>
@@ -823,7 +617,7 @@
 </file>
 
 <file path=ppt/notesSlides/notesSlide4.xml><?xml version="1.0" encoding="utf-8"?>
-<p:notes xmlns:a="http://schemas.openxmlformats.org/drawingml/2006/main" xmlns:p="http://schemas.openxmlformats.org/presentationml/2006/main" xmlns:r="http://schemas.openxmlformats.org/officeDocument/2006/relationships">
+<p:notes xmlns:a="http://schemas.openxmlformats.org/drawingml/2006/main" xmlns:r="http://schemas.openxmlformats.org/officeDocument/2006/relationships" xmlns:p="http://schemas.openxmlformats.org/presentationml/2006/main">
   <p:cSld>
     <p:spTree>
       <p:nvGrpSpPr>
@@ -843,7 +637,7 @@
         <p:nvSpPr>
           <p:cNvPr id="2" name="Slide Image Placeholder 1"/>
           <p:cNvSpPr>
-            <a:spLocks noGrp="1"/>
+            <a:spLocks noGrp="1" noRot="1" noChangeAspect="1"/>
           </p:cNvSpPr>
           <p:nvPr>
             <p:ph type="sldImg" idx="2"/>
@@ -858,7 +652,7 @@
             <a:spLocks noGrp="1"/>
           </p:cNvSpPr>
           <p:nvPr>
-            <p:ph type="body" idx="3" sz="quarter"/>
+            <p:ph type="body" sz="quarter" idx="3"/>
           </p:nvPr>
         </p:nvSpPr>
         <p:spPr/>
@@ -879,7 +673,7 @@
             <a:spLocks noGrp="1"/>
           </p:cNvSpPr>
           <p:nvPr>
-            <p:ph type="sldNum" idx="5" sz="quarter"/>
+            <p:ph type="sldNum" sz="quarter" idx="5"/>
           </p:nvPr>
         </p:nvSpPr>
         <p:spPr/>
@@ -893,7 +687,7 @@
 </file>
 
 <file path=ppt/notesSlides/notesSlide5.xml><?xml version="1.0" encoding="utf-8"?>
-<p:notes xmlns:a="http://schemas.openxmlformats.org/drawingml/2006/main" xmlns:p="http://schemas.openxmlformats.org/presentationml/2006/main" xmlns:r="http://schemas.openxmlformats.org/officeDocument/2006/relationships">
+<p:notes xmlns:a="http://schemas.openxmlformats.org/drawingml/2006/main" xmlns:r="http://schemas.openxmlformats.org/officeDocument/2006/relationships" xmlns:p="http://schemas.openxmlformats.org/presentationml/2006/main">
   <p:cSld>
     <p:spTree>
       <p:nvGrpSpPr>
@@ -913,7 +707,7 @@
         <p:nvSpPr>
           <p:cNvPr id="2" name="Slide Image Placeholder 1"/>
           <p:cNvSpPr>
-            <a:spLocks noGrp="1"/>
+            <a:spLocks noGrp="1" noRot="1" noChangeAspect="1"/>
           </p:cNvSpPr>
           <p:nvPr>
             <p:ph type="sldImg" idx="2"/>
@@ -928,7 +722,7 @@
             <a:spLocks noGrp="1"/>
           </p:cNvSpPr>
           <p:nvPr>
-            <p:ph type="body" idx="3" sz="quarter"/>
+            <p:ph type="body" sz="quarter" idx="3"/>
           </p:nvPr>
         </p:nvSpPr>
         <p:spPr/>
@@ -954,7 +748,7 @@
             <a:spLocks noGrp="1"/>
           </p:cNvSpPr>
           <p:nvPr>
-            <p:ph type="sldNum" idx="5" sz="quarter"/>
+            <p:ph type="sldNum" sz="quarter" idx="5"/>
           </p:nvPr>
         </p:nvSpPr>
         <p:spPr/>
@@ -968,7 +762,7 @@
 </file>
 
 <file path=ppt/notesSlides/notesSlide6.xml><?xml version="1.0" encoding="utf-8"?>
-<p:notes xmlns:a="http://schemas.openxmlformats.org/drawingml/2006/main" xmlns:p="http://schemas.openxmlformats.org/presentationml/2006/main" xmlns:r="http://schemas.openxmlformats.org/officeDocument/2006/relationships">
+<p:notes xmlns:a="http://schemas.openxmlformats.org/drawingml/2006/main" xmlns:r="http://schemas.openxmlformats.org/officeDocument/2006/relationships" xmlns:p="http://schemas.openxmlformats.org/presentationml/2006/main">
   <p:cSld>
     <p:spTree>
       <p:nvGrpSpPr>
@@ -988,7 +782,7 @@
         <p:nvSpPr>
           <p:cNvPr id="2" name="Slide Image Placeholder 1"/>
           <p:cNvSpPr>
-            <a:spLocks noGrp="1"/>
+            <a:spLocks noGrp="1" noRot="1" noChangeAspect="1"/>
           </p:cNvSpPr>
           <p:nvPr>
             <p:ph type="sldImg" idx="2"/>
@@ -1003,7 +797,7 @@
             <a:spLocks noGrp="1"/>
           </p:cNvSpPr>
           <p:nvPr>
-            <p:ph type="body" idx="3" sz="quarter"/>
+            <p:ph type="body" sz="quarter" idx="3"/>
           </p:nvPr>
         </p:nvSpPr>
         <p:spPr/>
@@ -1024,7 +818,7 @@
             <a:spLocks noGrp="1"/>
           </p:cNvSpPr>
           <p:nvPr>
-            <p:ph type="sldNum" idx="5" sz="quarter"/>
+            <p:ph type="sldNum" sz="quarter" idx="5"/>
           </p:nvPr>
         </p:nvSpPr>
         <p:spPr/>
@@ -1038,7 +832,7 @@
 </file>
 
 <file path=ppt/notesSlides/notesSlide7.xml><?xml version="1.0" encoding="utf-8"?>
-<p:notes xmlns:a="http://schemas.openxmlformats.org/drawingml/2006/main" xmlns:p="http://schemas.openxmlformats.org/presentationml/2006/main" xmlns:r="http://schemas.openxmlformats.org/officeDocument/2006/relationships">
+<p:notes xmlns:a="http://schemas.openxmlformats.org/drawingml/2006/main" xmlns:r="http://schemas.openxmlformats.org/officeDocument/2006/relationships" xmlns:p="http://schemas.openxmlformats.org/presentationml/2006/main">
   <p:cSld>
     <p:spTree>
       <p:nvGrpSpPr>
@@ -1058,7 +852,7 @@
         <p:nvSpPr>
           <p:cNvPr id="2" name="Slide Image Placeholder 1"/>
           <p:cNvSpPr>
-            <a:spLocks noGrp="1"/>
+            <a:spLocks noGrp="1" noRot="1" noChangeAspect="1"/>
           </p:cNvSpPr>
           <p:nvPr>
             <p:ph type="sldImg" idx="2"/>
@@ -1073,7 +867,7 @@
             <a:spLocks noGrp="1"/>
           </p:cNvSpPr>
           <p:nvPr>
-            <p:ph type="body" idx="3" sz="quarter"/>
+            <p:ph type="body" sz="quarter" idx="3"/>
           </p:nvPr>
         </p:nvSpPr>
         <p:spPr/>
@@ -1094,7 +888,7 @@
             <a:spLocks noGrp="1"/>
           </p:cNvSpPr>
           <p:nvPr>
-            <p:ph type="sldNum" idx="5" sz="quarter"/>
+            <p:ph type="sldNum" sz="quarter" idx="5"/>
           </p:nvPr>
         </p:nvSpPr>
         <p:spPr/>
@@ -1108,7 +902,7 @@
 </file>
 
 <file path=ppt/notesSlides/notesSlide8.xml><?xml version="1.0" encoding="utf-8"?>
-<p:notes xmlns:a="http://schemas.openxmlformats.org/drawingml/2006/main" xmlns:p="http://schemas.openxmlformats.org/presentationml/2006/main" xmlns:r="http://schemas.openxmlformats.org/officeDocument/2006/relationships">
+<p:notes xmlns:a="http://schemas.openxmlformats.org/drawingml/2006/main" xmlns:r="http://schemas.openxmlformats.org/officeDocument/2006/relationships" xmlns:p="http://schemas.openxmlformats.org/presentationml/2006/main">
   <p:cSld>
     <p:spTree>
       <p:nvGrpSpPr>
@@ -1128,7 +922,7 @@
         <p:nvSpPr>
           <p:cNvPr id="2" name="Slide Image Placeholder 1"/>
           <p:cNvSpPr>
-            <a:spLocks noGrp="1"/>
+            <a:spLocks noGrp="1" noRot="1" noChangeAspect="1"/>
           </p:cNvSpPr>
           <p:nvPr>
             <p:ph type="sldImg" idx="2"/>
@@ -1143,7 +937,7 @@
             <a:spLocks noGrp="1"/>
           </p:cNvSpPr>
           <p:nvPr>
-            <p:ph type="body" idx="3" sz="quarter"/>
+            <p:ph type="body" sz="quarter" idx="3"/>
           </p:nvPr>
         </p:nvSpPr>
         <p:spPr/>
@@ -1164,7 +958,7 @@
             <a:spLocks noGrp="1"/>
           </p:cNvSpPr>
           <p:nvPr>
-            <p:ph type="sldNum" idx="5" sz="quarter"/>
+            <p:ph type="sldNum" sz="quarter" idx="5"/>
           </p:nvPr>
         </p:nvSpPr>
         <p:spPr/>
@@ -1178,7 +972,7 @@
 </file>
 
 <file path=ppt/notesSlides/notesSlide9.xml><?xml version="1.0" encoding="utf-8"?>
-<p:notes xmlns:a="http://schemas.openxmlformats.org/drawingml/2006/main" xmlns:p="http://schemas.openxmlformats.org/presentationml/2006/main" xmlns:r="http://schemas.openxmlformats.org/officeDocument/2006/relationships">
+<p:notes xmlns:a="http://schemas.openxmlformats.org/drawingml/2006/main" xmlns:r="http://schemas.openxmlformats.org/officeDocument/2006/relationships" xmlns:p="http://schemas.openxmlformats.org/presentationml/2006/main">
   <p:cSld>
     <p:spTree>
       <p:nvGrpSpPr>
@@ -1198,7 +992,7 @@
         <p:nvSpPr>
           <p:cNvPr id="2" name="Slide Image Placeholder 1"/>
           <p:cNvSpPr>
-            <a:spLocks noGrp="1"/>
+            <a:spLocks noGrp="1" noRot="1" noChangeAspect="1"/>
           </p:cNvSpPr>
           <p:nvPr>
             <p:ph type="sldImg" idx="2"/>
@@ -1213,7 +1007,7 @@
             <a:spLocks noGrp="1"/>
           </p:cNvSpPr>
           <p:nvPr>
-            <p:ph type="body" idx="3" sz="quarter"/>
+            <p:ph type="body" sz="quarter" idx="3"/>
           </p:nvPr>
         </p:nvSpPr>
         <p:spPr/>
@@ -1234,7 +1028,7 @@
             <a:spLocks noGrp="1"/>
           </p:cNvSpPr>
           <p:nvPr>
-            <p:ph type="sldNum" idx="5" sz="quarter"/>
+            <p:ph type="sldNum" sz="quarter" idx="5"/>
           </p:nvPr>
         </p:nvSpPr>
         <p:spPr/>
@@ -1285,10 +1079,9 @@
           <a:lstStyle/>
           <a:p>
             <a:r>
-              <a:rPr lang="en-US" smtClean="0"/>
+              <a:rPr lang="en-US"/>
               <a:t>Click to edit Master title style</a:t>
             </a:r>
-            <a:endParaRPr lang="en-US"/>
           </a:p>
         </p:txBody>
       </p:sp>
@@ -1404,10 +1197,9 @@
           </a:lstStyle>
           <a:p>
             <a:r>
-              <a:rPr lang="en-US" smtClean="0"/>
+              <a:rPr lang="en-US"/>
               <a:t>Click to edit Master subtitle style</a:t>
             </a:r>
-            <a:endParaRPr lang="en-US"/>
           </a:p>
         </p:txBody>
       </p:sp>
@@ -1428,7 +1220,7 @@
           <a:p>
             <a:fld id="{5BCAD085-E8A6-8845-BD4E-CB4CCA059FC4}" type="datetimeFigureOut">
               <a:rPr lang="en-US" smtClean="0"/>
-              <a:t>1/27/13</a:t>
+              <a:t>5/9/2026</a:t>
             </a:fld>
             <a:endParaRPr lang="en-US"/>
           </a:p>
@@ -1522,10 +1314,9 @@
           <a:lstStyle/>
           <a:p>
             <a:r>
-              <a:rPr lang="en-US" smtClean="0"/>
+              <a:rPr lang="en-US"/>
               <a:t>Click to edit Master title style</a:t>
             </a:r>
-            <a:endParaRPr lang="en-US"/>
           </a:p>
         </p:txBody>
       </p:sp>
@@ -1546,38 +1337,37 @@
           <a:p>
             <a:pPr lvl="0"/>
             <a:r>
-              <a:rPr lang="en-US" smtClean="0"/>
+              <a:rPr lang="en-US"/>
               <a:t>Click to edit Master text styles</a:t>
             </a:r>
           </a:p>
           <a:p>
             <a:pPr lvl="1"/>
             <a:r>
-              <a:rPr lang="en-US" smtClean="0"/>
+              <a:rPr lang="en-US"/>
               <a:t>Second level</a:t>
             </a:r>
           </a:p>
           <a:p>
             <a:pPr lvl="2"/>
             <a:r>
-              <a:rPr lang="en-US" smtClean="0"/>
+              <a:rPr lang="en-US"/>
               <a:t>Third level</a:t>
             </a:r>
           </a:p>
           <a:p>
             <a:pPr lvl="3"/>
             <a:r>
-              <a:rPr lang="en-US" smtClean="0"/>
+              <a:rPr lang="en-US"/>
               <a:t>Fourth level</a:t>
             </a:r>
           </a:p>
           <a:p>
             <a:pPr lvl="4"/>
             <a:r>
-              <a:rPr lang="en-US" smtClean="0"/>
+              <a:rPr lang="en-US"/>
               <a:t>Fifth level</a:t>
             </a:r>
-            <a:endParaRPr lang="en-US"/>
           </a:p>
         </p:txBody>
       </p:sp>
@@ -1598,7 +1388,7 @@
           <a:p>
             <a:fld id="{5BCAD085-E8A6-8845-BD4E-CB4CCA059FC4}" type="datetimeFigureOut">
               <a:rPr lang="en-US" smtClean="0"/>
-              <a:t>1/27/13</a:t>
+              <a:t>5/9/2026</a:t>
             </a:fld>
             <a:endParaRPr lang="en-US"/>
           </a:p>
@@ -1697,10 +1487,9 @@
           <a:lstStyle/>
           <a:p>
             <a:r>
-              <a:rPr lang="en-US" smtClean="0"/>
+              <a:rPr lang="en-US"/>
               <a:t>Click to edit Master title style</a:t>
             </a:r>
-            <a:endParaRPr lang="en-US"/>
           </a:p>
         </p:txBody>
       </p:sp>
@@ -1726,38 +1515,37 @@
           <a:p>
             <a:pPr lvl="0"/>
             <a:r>
-              <a:rPr lang="en-US" smtClean="0"/>
+              <a:rPr lang="en-US"/>
               <a:t>Click to edit Master text styles</a:t>
             </a:r>
           </a:p>
           <a:p>
             <a:pPr lvl="1"/>
             <a:r>
-              <a:rPr lang="en-US" smtClean="0"/>
+              <a:rPr lang="en-US"/>
               <a:t>Second level</a:t>
             </a:r>
           </a:p>
           <a:p>
             <a:pPr lvl="2"/>
             <a:r>
-              <a:rPr lang="en-US" smtClean="0"/>
+              <a:rPr lang="en-US"/>
               <a:t>Third level</a:t>
             </a:r>
           </a:p>
           <a:p>
             <a:pPr lvl="3"/>
             <a:r>
-              <a:rPr lang="en-US" smtClean="0"/>
+              <a:rPr lang="en-US"/>
               <a:t>Fourth level</a:t>
             </a:r>
           </a:p>
           <a:p>
             <a:pPr lvl="4"/>
             <a:r>
-              <a:rPr lang="en-US" smtClean="0"/>
+              <a:rPr lang="en-US"/>
               <a:t>Fifth level</a:t>
             </a:r>
-            <a:endParaRPr lang="en-US"/>
           </a:p>
         </p:txBody>
       </p:sp>
@@ -1778,7 +1566,7 @@
           <a:p>
             <a:fld id="{5BCAD085-E8A6-8845-BD4E-CB4CCA059FC4}" type="datetimeFigureOut">
               <a:rPr lang="en-US" smtClean="0"/>
-              <a:t>1/27/13</a:t>
+              <a:t>5/9/2026</a:t>
             </a:fld>
             <a:endParaRPr lang="en-US"/>
           </a:p>
@@ -1872,10 +1660,9 @@
           <a:lstStyle/>
           <a:p>
             <a:r>
-              <a:rPr lang="en-US" smtClean="0"/>
+              <a:rPr lang="en-US"/>
               <a:t>Click to edit Master title style</a:t>
             </a:r>
-            <a:endParaRPr lang="en-US"/>
           </a:p>
         </p:txBody>
       </p:sp>
@@ -1896,38 +1683,37 @@
           <a:p>
             <a:pPr lvl="0"/>
             <a:r>
-              <a:rPr lang="en-US" smtClean="0"/>
+              <a:rPr lang="en-US"/>
               <a:t>Click to edit Master text styles</a:t>
             </a:r>
           </a:p>
           <a:p>
             <a:pPr lvl="1"/>
             <a:r>
-              <a:rPr lang="en-US" smtClean="0"/>
+              <a:rPr lang="en-US"/>
               <a:t>Second level</a:t>
             </a:r>
           </a:p>
           <a:p>
             <a:pPr lvl="2"/>
             <a:r>
-              <a:rPr lang="en-US" smtClean="0"/>
+              <a:rPr lang="en-US"/>
               <a:t>Third level</a:t>
             </a:r>
           </a:p>
           <a:p>
             <a:pPr lvl="3"/>
             <a:r>
-              <a:rPr lang="en-US" smtClean="0"/>
+              <a:rPr lang="en-US"/>
               <a:t>Fourth level</a:t>
             </a:r>
           </a:p>
           <a:p>
             <a:pPr lvl="4"/>
             <a:r>
-              <a:rPr lang="en-US" smtClean="0"/>
+              <a:rPr lang="en-US"/>
               <a:t>Fifth level</a:t>
             </a:r>
-            <a:endParaRPr lang="en-US"/>
           </a:p>
         </p:txBody>
       </p:sp>
@@ -1948,7 +1734,7 @@
           <a:p>
             <a:fld id="{5BCAD085-E8A6-8845-BD4E-CB4CCA059FC4}" type="datetimeFigureOut">
               <a:rPr lang="en-US" smtClean="0"/>
-              <a:t>1/27/13</a:t>
+              <a:t>5/9/2026</a:t>
             </a:fld>
             <a:endParaRPr lang="en-US"/>
           </a:p>
@@ -2051,10 +1837,9 @@
           </a:lstStyle>
           <a:p>
             <a:r>
-              <a:rPr lang="en-US" smtClean="0"/>
+              <a:rPr lang="en-US"/>
               <a:t>Click to edit Master title style</a:t>
             </a:r>
-            <a:endParaRPr lang="en-US"/>
           </a:p>
         </p:txBody>
       </p:sp>
@@ -2171,7 +1956,7 @@
           <a:p>
             <a:pPr lvl="0"/>
             <a:r>
-              <a:rPr lang="en-US" smtClean="0"/>
+              <a:rPr lang="en-US"/>
               <a:t>Click to edit Master text styles</a:t>
             </a:r>
           </a:p>
@@ -2194,7 +1979,7 @@
           <a:p>
             <a:fld id="{5BCAD085-E8A6-8845-BD4E-CB4CCA059FC4}" type="datetimeFigureOut">
               <a:rPr lang="en-US" smtClean="0"/>
-              <a:t>1/27/13</a:t>
+              <a:t>5/9/2026</a:t>
             </a:fld>
             <a:endParaRPr lang="en-US"/>
           </a:p>
@@ -2288,10 +2073,9 @@
           <a:lstStyle/>
           <a:p>
             <a:r>
-              <a:rPr lang="en-US" smtClean="0"/>
+              <a:rPr lang="en-US"/>
               <a:t>Click to edit Master title style</a:t>
             </a:r>
-            <a:endParaRPr lang="en-US"/>
           </a:p>
         </p:txBody>
       </p:sp>
@@ -2345,38 +2129,37 @@
           <a:p>
             <a:pPr lvl="0"/>
             <a:r>
-              <a:rPr lang="en-US" smtClean="0"/>
+              <a:rPr lang="en-US"/>
               <a:t>Click to edit Master text styles</a:t>
             </a:r>
           </a:p>
           <a:p>
             <a:pPr lvl="1"/>
             <a:r>
-              <a:rPr lang="en-US" smtClean="0"/>
+              <a:rPr lang="en-US"/>
               <a:t>Second level</a:t>
             </a:r>
           </a:p>
           <a:p>
             <a:pPr lvl="2"/>
             <a:r>
-              <a:rPr lang="en-US" smtClean="0"/>
+              <a:rPr lang="en-US"/>
               <a:t>Third level</a:t>
             </a:r>
           </a:p>
           <a:p>
             <a:pPr lvl="3"/>
             <a:r>
-              <a:rPr lang="en-US" smtClean="0"/>
+              <a:rPr lang="en-US"/>
               <a:t>Fourth level</a:t>
             </a:r>
           </a:p>
           <a:p>
             <a:pPr lvl="4"/>
             <a:r>
-              <a:rPr lang="en-US" smtClean="0"/>
+              <a:rPr lang="en-US"/>
               <a:t>Fifth level</a:t>
             </a:r>
-            <a:endParaRPr lang="en-US"/>
           </a:p>
         </p:txBody>
       </p:sp>
@@ -2430,38 +2213,37 @@
           <a:p>
             <a:pPr lvl="0"/>
             <a:r>
-              <a:rPr lang="en-US" smtClean="0"/>
+              <a:rPr lang="en-US"/>
               <a:t>Click to edit Master text styles</a:t>
             </a:r>
           </a:p>
           <a:p>
             <a:pPr lvl="1"/>
             <a:r>
-              <a:rPr lang="en-US" smtClean="0"/>
+              <a:rPr lang="en-US"/>
               <a:t>Second level</a:t>
             </a:r>
           </a:p>
           <a:p>
             <a:pPr lvl="2"/>
             <a:r>
-              <a:rPr lang="en-US" smtClean="0"/>
+              <a:rPr lang="en-US"/>
               <a:t>Third level</a:t>
             </a:r>
           </a:p>
           <a:p>
             <a:pPr lvl="3"/>
             <a:r>
-              <a:rPr lang="en-US" smtClean="0"/>
+              <a:rPr lang="en-US"/>
               <a:t>Fourth level</a:t>
             </a:r>
           </a:p>
           <a:p>
             <a:pPr lvl="4"/>
             <a:r>
-              <a:rPr lang="en-US" smtClean="0"/>
+              <a:rPr lang="en-US"/>
               <a:t>Fifth level</a:t>
             </a:r>
-            <a:endParaRPr lang="en-US"/>
           </a:p>
         </p:txBody>
       </p:sp>
@@ -2482,7 +2264,7 @@
           <a:p>
             <a:fld id="{5BCAD085-E8A6-8845-BD4E-CB4CCA059FC4}" type="datetimeFigureOut">
               <a:rPr lang="en-US" smtClean="0"/>
-              <a:t>1/27/13</a:t>
+              <a:t>5/9/2026</a:t>
             </a:fld>
             <a:endParaRPr lang="en-US"/>
           </a:p>
@@ -2580,10 +2362,9 @@
           </a:lstStyle>
           <a:p>
             <a:r>
-              <a:rPr lang="en-US" smtClean="0"/>
+              <a:rPr lang="en-US"/>
               <a:t>Click to edit Master title style</a:t>
             </a:r>
-            <a:endParaRPr lang="en-US"/>
           </a:p>
         </p:txBody>
       </p:sp>
@@ -2646,7 +2427,7 @@
           <a:p>
             <a:pPr lvl="0"/>
             <a:r>
-              <a:rPr lang="en-US" smtClean="0"/>
+              <a:rPr lang="en-US"/>
               <a:t>Click to edit Master text styles</a:t>
             </a:r>
           </a:p>
@@ -2702,38 +2483,37 @@
           <a:p>
             <a:pPr lvl="0"/>
             <a:r>
-              <a:rPr lang="en-US" smtClean="0"/>
+              <a:rPr lang="en-US"/>
               <a:t>Click to edit Master text styles</a:t>
             </a:r>
           </a:p>
           <a:p>
             <a:pPr lvl="1"/>
             <a:r>
-              <a:rPr lang="en-US" smtClean="0"/>
+              <a:rPr lang="en-US"/>
               <a:t>Second level</a:t>
             </a:r>
           </a:p>
           <a:p>
             <a:pPr lvl="2"/>
             <a:r>
-              <a:rPr lang="en-US" smtClean="0"/>
+              <a:rPr lang="en-US"/>
               <a:t>Third level</a:t>
             </a:r>
           </a:p>
           <a:p>
             <a:pPr lvl="3"/>
             <a:r>
-              <a:rPr lang="en-US" smtClean="0"/>
+              <a:rPr lang="en-US"/>
               <a:t>Fourth level</a:t>
             </a:r>
           </a:p>
           <a:p>
             <a:pPr lvl="4"/>
             <a:r>
-              <a:rPr lang="en-US" smtClean="0"/>
+              <a:rPr lang="en-US"/>
               <a:t>Fifth level</a:t>
             </a:r>
-            <a:endParaRPr lang="en-US"/>
           </a:p>
         </p:txBody>
       </p:sp>
@@ -2796,7 +2576,7 @@
           <a:p>
             <a:pPr lvl="0"/>
             <a:r>
-              <a:rPr lang="en-US" smtClean="0"/>
+              <a:rPr lang="en-US"/>
               <a:t>Click to edit Master text styles</a:t>
             </a:r>
           </a:p>
@@ -2852,38 +2632,37 @@
           <a:p>
             <a:pPr lvl="0"/>
             <a:r>
-              <a:rPr lang="en-US" smtClean="0"/>
+              <a:rPr lang="en-US"/>
               <a:t>Click to edit Master text styles</a:t>
             </a:r>
           </a:p>
           <a:p>
             <a:pPr lvl="1"/>
             <a:r>
-              <a:rPr lang="en-US" smtClean="0"/>
+              <a:rPr lang="en-US"/>
               <a:t>Second level</a:t>
             </a:r>
           </a:p>
           <a:p>
             <a:pPr lvl="2"/>
             <a:r>
-              <a:rPr lang="en-US" smtClean="0"/>
+              <a:rPr lang="en-US"/>
               <a:t>Third level</a:t>
             </a:r>
           </a:p>
           <a:p>
             <a:pPr lvl="3"/>
             <a:r>
-              <a:rPr lang="en-US" smtClean="0"/>
+              <a:rPr lang="en-US"/>
               <a:t>Fourth level</a:t>
             </a:r>
           </a:p>
           <a:p>
             <a:pPr lvl="4"/>
             <a:r>
-              <a:rPr lang="en-US" smtClean="0"/>
+              <a:rPr lang="en-US"/>
               <a:t>Fifth level</a:t>
             </a:r>
-            <a:endParaRPr lang="en-US"/>
           </a:p>
         </p:txBody>
       </p:sp>
@@ -2904,7 +2683,7 @@
           <a:p>
             <a:fld id="{5BCAD085-E8A6-8845-BD4E-CB4CCA059FC4}" type="datetimeFigureOut">
               <a:rPr lang="en-US" smtClean="0"/>
-              <a:t>1/27/13</a:t>
+              <a:t>5/9/2026</a:t>
             </a:fld>
             <a:endParaRPr lang="en-US"/>
           </a:p>
@@ -2998,10 +2777,9 @@
           <a:lstStyle/>
           <a:p>
             <a:r>
-              <a:rPr lang="en-US" smtClean="0"/>
+              <a:rPr lang="en-US"/>
               <a:t>Click to edit Master title style</a:t>
             </a:r>
-            <a:endParaRPr lang="en-US"/>
           </a:p>
         </p:txBody>
       </p:sp>
@@ -3022,7 +2800,7 @@
           <a:p>
             <a:fld id="{5BCAD085-E8A6-8845-BD4E-CB4CCA059FC4}" type="datetimeFigureOut">
               <a:rPr lang="en-US" smtClean="0"/>
-              <a:t>1/27/13</a:t>
+              <a:t>5/9/2026</a:t>
             </a:fld>
             <a:endParaRPr lang="en-US"/>
           </a:p>
@@ -3117,7 +2895,7 @@
           <a:p>
             <a:fld id="{5BCAD085-E8A6-8845-BD4E-CB4CCA059FC4}" type="datetimeFigureOut">
               <a:rPr lang="en-US" smtClean="0"/>
-              <a:t>1/27/13</a:t>
+              <a:t>5/9/2026</a:t>
             </a:fld>
             <a:endParaRPr lang="en-US"/>
           </a:p>
@@ -3220,10 +2998,9 @@
           </a:lstStyle>
           <a:p>
             <a:r>
-              <a:rPr lang="en-US" smtClean="0"/>
+              <a:rPr lang="en-US"/>
               <a:t>Click to edit Master title style</a:t>
             </a:r>
-            <a:endParaRPr lang="en-US"/>
           </a:p>
         </p:txBody>
       </p:sp>
@@ -3277,38 +3054,37 @@
           <a:p>
             <a:pPr lvl="0"/>
             <a:r>
-              <a:rPr lang="en-US" smtClean="0"/>
+              <a:rPr lang="en-US"/>
               <a:t>Click to edit Master text styles</a:t>
             </a:r>
           </a:p>
           <a:p>
             <a:pPr lvl="1"/>
             <a:r>
-              <a:rPr lang="en-US" smtClean="0"/>
+              <a:rPr lang="en-US"/>
               <a:t>Second level</a:t>
             </a:r>
           </a:p>
           <a:p>
             <a:pPr lvl="2"/>
             <a:r>
-              <a:rPr lang="en-US" smtClean="0"/>
+              <a:rPr lang="en-US"/>
               <a:t>Third level</a:t>
             </a:r>
           </a:p>
           <a:p>
             <a:pPr lvl="3"/>
             <a:r>
-              <a:rPr lang="en-US" smtClean="0"/>
+              <a:rPr lang="en-US"/>
               <a:t>Fourth level</a:t>
             </a:r>
           </a:p>
           <a:p>
             <a:pPr lvl="4"/>
             <a:r>
-              <a:rPr lang="en-US" smtClean="0"/>
+              <a:rPr lang="en-US"/>
               <a:t>Fifth level</a:t>
             </a:r>
-            <a:endParaRPr lang="en-US"/>
           </a:p>
         </p:txBody>
       </p:sp>
@@ -3371,7 +3147,7 @@
           <a:p>
             <a:pPr lvl="0"/>
             <a:r>
-              <a:rPr lang="en-US" smtClean="0"/>
+              <a:rPr lang="en-US"/>
               <a:t>Click to edit Master text styles</a:t>
             </a:r>
           </a:p>
@@ -3394,7 +3170,7 @@
           <a:p>
             <a:fld id="{5BCAD085-E8A6-8845-BD4E-CB4CCA059FC4}" type="datetimeFigureOut">
               <a:rPr lang="en-US" smtClean="0"/>
-              <a:t>1/27/13</a:t>
+              <a:t>5/9/2026</a:t>
             </a:fld>
             <a:endParaRPr lang="en-US"/>
           </a:p>
@@ -3497,10 +3273,9 @@
           </a:lstStyle>
           <a:p>
             <a:r>
-              <a:rPr lang="en-US" smtClean="0"/>
+              <a:rPr lang="en-US"/>
               <a:t>Click to edit Master title style</a:t>
             </a:r>
-            <a:endParaRPr lang="en-US"/>
           </a:p>
         </p:txBody>
       </p:sp>
@@ -3624,7 +3399,7 @@
           <a:p>
             <a:pPr lvl="0"/>
             <a:r>
-              <a:rPr lang="en-US" smtClean="0"/>
+              <a:rPr lang="en-US"/>
               <a:t>Click to edit Master text styles</a:t>
             </a:r>
           </a:p>
@@ -3647,7 +3422,7 @@
           <a:p>
             <a:fld id="{5BCAD085-E8A6-8845-BD4E-CB4CCA059FC4}" type="datetimeFigureOut">
               <a:rPr lang="en-US" smtClean="0"/>
-              <a:t>1/27/13</a:t>
+              <a:t>5/9/2026</a:t>
             </a:fld>
             <a:endParaRPr lang="en-US"/>
           </a:p>
@@ -3756,10 +3531,9 @@
           <a:lstStyle/>
           <a:p>
             <a:r>
-              <a:rPr lang="en-US" smtClean="0"/>
+              <a:rPr lang="en-US"/>
               <a:t>Click to edit Master title style</a:t>
             </a:r>
-            <a:endParaRPr lang="en-US"/>
           </a:p>
         </p:txBody>
       </p:sp>
@@ -3790,38 +3564,37 @@
           <a:p>
             <a:pPr lvl="0"/>
             <a:r>
-              <a:rPr lang="en-US" smtClean="0"/>
+              <a:rPr lang="en-US"/>
               <a:t>Click to edit Master text styles</a:t>
             </a:r>
           </a:p>
           <a:p>
             <a:pPr lvl="1"/>
             <a:r>
-              <a:rPr lang="en-US" smtClean="0"/>
+              <a:rPr lang="en-US"/>
               <a:t>Second level</a:t>
             </a:r>
           </a:p>
           <a:p>
             <a:pPr lvl="2"/>
             <a:r>
-              <a:rPr lang="en-US" smtClean="0"/>
+              <a:rPr lang="en-US"/>
               <a:t>Third level</a:t>
             </a:r>
           </a:p>
           <a:p>
             <a:pPr lvl="3"/>
             <a:r>
-              <a:rPr lang="en-US" smtClean="0"/>
+              <a:rPr lang="en-US"/>
               <a:t>Fourth level</a:t>
             </a:r>
           </a:p>
           <a:p>
             <a:pPr lvl="4"/>
             <a:r>
-              <a:rPr lang="en-US" smtClean="0"/>
+              <a:rPr lang="en-US"/>
               <a:t>Fifth level</a:t>
             </a:r>
-            <a:endParaRPr lang="en-US"/>
           </a:p>
         </p:txBody>
       </p:sp>
@@ -3860,7 +3633,7 @@
           <a:p>
             <a:fld id="{5BCAD085-E8A6-8845-BD4E-CB4CCA059FC4}" type="datetimeFigureOut">
               <a:rPr lang="en-US" smtClean="0"/>
-              <a:t>1/27/13</a:t>
+              <a:t>5/9/2026</a:t>
             </a:fld>
             <a:endParaRPr lang="en-US"/>
           </a:p>
@@ -4219,7 +3992,7 @@
 </file>
 
 <file path=ppt/slides/slide1.xml><?xml version="1.0" encoding="utf-8"?>
-<p:sld xmlns:a="http://schemas.openxmlformats.org/drawingml/2006/main" xmlns:p="http://schemas.openxmlformats.org/presentationml/2006/main" xmlns:r="http://schemas.openxmlformats.org/officeDocument/2006/relationships">
+<p:sld xmlns:a="http://schemas.openxmlformats.org/drawingml/2006/main" xmlns:r="http://schemas.openxmlformats.org/officeDocument/2006/relationships" xmlns:p="http://schemas.openxmlformats.org/presentationml/2006/main">
   <p:cSld>
     <p:bg>
       <p:bgPr>
@@ -4235,7 +4008,14 @@
         <p:cNvGrpSpPr/>
         <p:nvPr/>
       </p:nvGrpSpPr>
-      <p:grpSpPr/>
+      <p:grpSpPr>
+        <a:xfrm>
+          <a:off x="0" y="0"/>
+          <a:ext cx="0" cy="0"/>
+          <a:chOff x="0" y="0"/>
+          <a:chExt cx="0" cy="0"/>
+        </a:xfrm>
+      </p:grpSpPr>
       <p:sp>
         <p:nvSpPr>
           <p:cNvPr id="2" name="Rectangle 1"/>
@@ -4276,6 +4056,7 @@
           <a:lstStyle/>
           <a:p>
             <a:pPr algn="ctr"/>
+            <a:endParaRPr/>
           </a:p>
         </p:txBody>
       </p:sp>
@@ -4401,6 +4182,7 @@
           <a:lstStyle/>
           <a:p>
             <a:pPr algn="ctr"/>
+            <a:endParaRPr/>
           </a:p>
         </p:txBody>
       </p:sp>
@@ -4526,6 +4308,7 @@
           <a:lstStyle/>
           <a:p>
             <a:pPr algn="ctr"/>
+            <a:endParaRPr/>
           </a:p>
         </p:txBody>
       </p:sp>
@@ -4612,6 +4395,7 @@
           <a:lstStyle/>
           <a:p>
             <a:pPr algn="ctr"/>
+            <a:endParaRPr/>
           </a:p>
         </p:txBody>
       </p:sp>
@@ -4698,6 +4482,7 @@
           <a:lstStyle/>
           <a:p>
             <a:pPr algn="ctr"/>
+            <a:endParaRPr/>
           </a:p>
         </p:txBody>
       </p:sp>
@@ -4749,7 +4534,7 @@
 </file>
 
 <file path=ppt/slides/slide10.xml><?xml version="1.0" encoding="utf-8"?>
-<p:sld xmlns:a="http://schemas.openxmlformats.org/drawingml/2006/main" xmlns:p="http://schemas.openxmlformats.org/presentationml/2006/main" xmlns:r="http://schemas.openxmlformats.org/officeDocument/2006/relationships">
+<p:sld xmlns:a="http://schemas.openxmlformats.org/drawingml/2006/main" xmlns:r="http://schemas.openxmlformats.org/officeDocument/2006/relationships" xmlns:p="http://schemas.openxmlformats.org/presentationml/2006/main">
   <p:cSld>
     <p:bg>
       <p:bgPr>
@@ -4765,7 +4550,14 @@
         <p:cNvGrpSpPr/>
         <p:nvPr/>
       </p:nvGrpSpPr>
-      <p:grpSpPr/>
+      <p:grpSpPr>
+        <a:xfrm>
+          <a:off x="0" y="0"/>
+          <a:ext cx="0" cy="0"/>
+          <a:chOff x="0" y="0"/>
+          <a:chExt cx="0" cy="0"/>
+        </a:xfrm>
+      </p:grpSpPr>
       <p:sp>
         <p:nvSpPr>
           <p:cNvPr id="2" name="Rectangle 1"/>
@@ -4806,6 +4598,7 @@
           <a:lstStyle/>
           <a:p>
             <a:pPr algn="ctr"/>
+            <a:endParaRPr/>
           </a:p>
         </p:txBody>
       </p:sp>
@@ -4888,6 +4681,7 @@
           <a:lstStyle/>
           <a:p>
             <a:pPr algn="ctr"/>
+            <a:endParaRPr/>
           </a:p>
         </p:txBody>
       </p:sp>
@@ -4935,6 +4729,7 @@
           <a:lstStyle/>
           <a:p>
             <a:pPr algn="ctr"/>
+            <a:endParaRPr/>
           </a:p>
         </p:txBody>
       </p:sp>
@@ -5108,6 +4903,7 @@
           <a:lstStyle/>
           <a:p>
             <a:pPr algn="ctr"/>
+            <a:endParaRPr/>
           </a:p>
         </p:txBody>
       </p:sp>
@@ -5265,6 +5061,7 @@
           <a:lstStyle/>
           <a:p>
             <a:pPr algn="ctr"/>
+            <a:endParaRPr/>
           </a:p>
         </p:txBody>
       </p:sp>
@@ -5387,7 +5184,7 @@
 </file>
 
 <file path=ppt/slides/slide11.xml><?xml version="1.0" encoding="utf-8"?>
-<p:sld xmlns:a="http://schemas.openxmlformats.org/drawingml/2006/main" xmlns:p="http://schemas.openxmlformats.org/presentationml/2006/main" xmlns:r="http://schemas.openxmlformats.org/officeDocument/2006/relationships">
+<p:sld xmlns:a="http://schemas.openxmlformats.org/drawingml/2006/main" xmlns:r="http://schemas.openxmlformats.org/officeDocument/2006/relationships" xmlns:p="http://schemas.openxmlformats.org/presentationml/2006/main">
   <p:cSld>
     <p:bg>
       <p:bgPr>
@@ -5403,7 +5200,14 @@
         <p:cNvGrpSpPr/>
         <p:nvPr/>
       </p:nvGrpSpPr>
-      <p:grpSpPr/>
+      <p:grpSpPr>
+        <a:xfrm>
+          <a:off x="0" y="0"/>
+          <a:ext cx="0" cy="0"/>
+          <a:chOff x="0" y="0"/>
+          <a:chExt cx="0" cy="0"/>
+        </a:xfrm>
+      </p:grpSpPr>
       <p:sp>
         <p:nvSpPr>
           <p:cNvPr id="2" name="Rectangle 1"/>
@@ -5444,6 +5248,7 @@
           <a:lstStyle/>
           <a:p>
             <a:pPr algn="ctr"/>
+            <a:endParaRPr/>
           </a:p>
         </p:txBody>
       </p:sp>
@@ -5526,6 +5331,7 @@
           <a:lstStyle/>
           <a:p>
             <a:pPr algn="ctr"/>
+            <a:endParaRPr/>
           </a:p>
         </p:txBody>
       </p:sp>
@@ -5571,6 +5377,7 @@
           <a:lstStyle/>
           <a:p>
             <a:pPr algn="ctr"/>
+            <a:endParaRPr/>
           </a:p>
         </p:txBody>
       </p:sp>
@@ -5696,6 +5503,7 @@
           <a:lstStyle/>
           <a:p>
             <a:pPr algn="ctr"/>
+            <a:endParaRPr/>
           </a:p>
         </p:txBody>
       </p:sp>
@@ -5853,6 +5661,7 @@
           <a:lstStyle/>
           <a:p>
             <a:pPr algn="ctr"/>
+            <a:endParaRPr/>
           </a:p>
         </p:txBody>
       </p:sp>
@@ -5975,7 +5784,7 @@
 </file>
 
 <file path=ppt/slides/slide2.xml><?xml version="1.0" encoding="utf-8"?>
-<p:sld xmlns:a="http://schemas.openxmlformats.org/drawingml/2006/main" xmlns:p="http://schemas.openxmlformats.org/presentationml/2006/main" xmlns:r="http://schemas.openxmlformats.org/officeDocument/2006/relationships">
+<p:sld xmlns:a="http://schemas.openxmlformats.org/drawingml/2006/main" xmlns:r="http://schemas.openxmlformats.org/officeDocument/2006/relationships" xmlns:p="http://schemas.openxmlformats.org/presentationml/2006/main">
   <p:cSld>
     <p:bg>
       <p:bgPr>
@@ -5991,7 +5800,14 @@
         <p:cNvGrpSpPr/>
         <p:nvPr/>
       </p:nvGrpSpPr>
-      <p:grpSpPr/>
+      <p:grpSpPr>
+        <a:xfrm>
+          <a:off x="0" y="0"/>
+          <a:ext cx="0" cy="0"/>
+          <a:chOff x="0" y="0"/>
+          <a:chExt cx="0" cy="0"/>
+        </a:xfrm>
+      </p:grpSpPr>
       <p:sp>
         <p:nvSpPr>
           <p:cNvPr id="2" name="Rectangle 1"/>
@@ -6032,6 +5848,7 @@
           <a:lstStyle/>
           <a:p>
             <a:pPr algn="ctr"/>
+            <a:endParaRPr/>
           </a:p>
         </p:txBody>
       </p:sp>
@@ -6069,7 +5886,7 @@
                 </a:solidFill>
                 <a:latin typeface="Microsoft YaHei"/>
               </a:rPr>
-              <a:t>业务机会与 Why Now</a:t>
+              <a:t>当前差距与优先痛点</a:t>
             </a:r>
           </a:p>
         </p:txBody>
@@ -6114,6 +5931,7 @@
           <a:lstStyle/>
           <a:p>
             <a:pPr algn="ctr"/>
+            <a:endParaRPr/>
           </a:p>
         </p:txBody>
       </p:sp>
@@ -6125,8 +5943,8 @@
         </p:nvSpPr>
         <p:spPr>
           <a:xfrm>
-            <a:off x="822960" y="1783080"/>
-            <a:ext cx="3291840" cy="4389120"/>
+            <a:off x="822960" y="1737360"/>
+            <a:ext cx="5074920" cy="4389120"/>
           </a:xfrm>
           <a:prstGeom prst="roundRect">
             <a:avLst>
@@ -6161,6 +5979,7 @@
           <a:lstStyle/>
           <a:p>
             <a:pPr algn="ctr"/>
+            <a:endParaRPr/>
           </a:p>
         </p:txBody>
       </p:sp>
@@ -6172,8 +5991,8 @@
         </p:nvSpPr>
         <p:spPr>
           <a:xfrm>
-            <a:off x="1051560" y="2011680"/>
-            <a:ext cx="2834640" cy="274320"/>
+            <a:off x="1143000" y="1965960"/>
+            <a:ext cx="4434840" cy="274320"/>
           </a:xfrm>
           <a:prstGeom prst="rect">
             <a:avLst/>
@@ -6198,7 +6017,7 @@
                 </a:solidFill>
                 <a:latin typeface="Microsoft YaHei"/>
               </a:rPr>
-              <a:t>机会判断</a:t>
+              <a:t>现状流程</a:t>
             </a:r>
           </a:p>
         </p:txBody>
@@ -6211,8 +6030,8 @@
         </p:nvSpPr>
         <p:spPr>
           <a:xfrm>
-            <a:off x="1051560" y="2606040"/>
-            <a:ext cx="2834640" cy="3246120"/>
+            <a:off x="1097280" y="2468880"/>
+            <a:ext cx="4526280" cy="3154680"/>
           </a:xfrm>
           <a:prstGeom prst="rect">
             <a:avLst/>
@@ -6220,7 +6039,7 @@
           <a:noFill/>
         </p:spPr>
         <p:txBody>
-          <a:bodyPr wrap="square" anchor="ctr">
+          <a:bodyPr wrap="square" anchor="t">
             <a:spAutoFit/>
           </a:bodyPr>
           <a:lstStyle/>
@@ -6237,7 +6056,55 @@
                 </a:solidFill>
                 <a:latin typeface="Microsoft YaHei"/>
               </a:rPr>
-              <a:t>把传统售后从人工查资料、人工找专家升级为设备状态驱动的智能服务闭环，是消费电子 IoT 企业提升服务体验与运营效率的直接切口。</a:t>
+              <a:t>1. 客户报修后，客服需要人工确认设备型号、状态和问题描述</a:t>
+            </a:r>
+          </a:p>
+          <a:p>
+            <a:pPr algn="l">
+              <a:spcAft>
+                <a:spcPts val="800"/>
+              </a:spcAft>
+            </a:pPr>
+            <a:r>
+              <a:rPr sz="1450" b="0">
+                <a:solidFill>
+                  <a:srgbClr val="555555"/>
+                </a:solidFill>
+                <a:latin typeface="Microsoft YaHei"/>
+              </a:rPr>
+              <a:t>2. 客服切换多个系统查看历史工单、FAQ 和维修资料</a:t>
+            </a:r>
+          </a:p>
+          <a:p>
+            <a:pPr algn="l">
+              <a:spcAft>
+                <a:spcPts val="800"/>
+              </a:spcAft>
+            </a:pPr>
+            <a:r>
+              <a:rPr sz="1450" b="0">
+                <a:solidFill>
+                  <a:srgbClr val="555555"/>
+                </a:solidFill>
+                <a:latin typeface="Microsoft YaHei"/>
+              </a:rPr>
+              <a:t>3. 问题判断依赖个人经验，回复质量与处理速度波动较大</a:t>
+            </a:r>
+          </a:p>
+          <a:p>
+            <a:pPr algn="l">
+              <a:spcAft>
+                <a:spcPts val="800"/>
+              </a:spcAft>
+            </a:pPr>
+            <a:r>
+              <a:rPr sz="1450" b="0">
+                <a:solidFill>
+                  <a:srgbClr val="555555"/>
+                </a:solidFill>
+                <a:latin typeface="Microsoft YaHei"/>
+              </a:rPr>
+              <a:t>4. 复杂问题频繁升级专家或二线支持，服务链路变长</a:t>
             </a:r>
           </a:p>
         </p:txBody>
@@ -6250,8 +6117,8 @@
         </p:nvSpPr>
         <p:spPr>
           <a:xfrm>
-            <a:off x="4453128" y="1783080"/>
-            <a:ext cx="3291840" cy="4389120"/>
+            <a:off x="6172200" y="1737360"/>
+            <a:ext cx="5120640" cy="3017520"/>
           </a:xfrm>
           <a:prstGeom prst="roundRect">
             <a:avLst>
@@ -6286,6 +6153,7 @@
           <a:lstStyle/>
           <a:p>
             <a:pPr algn="ctr"/>
+            <a:endParaRPr/>
           </a:p>
         </p:txBody>
       </p:sp>
@@ -6297,8 +6165,8 @@
         </p:nvSpPr>
         <p:spPr>
           <a:xfrm>
-            <a:off x="4681728" y="2011680"/>
-            <a:ext cx="2834640" cy="274320"/>
+            <a:off x="6492240" y="1965960"/>
+            <a:ext cx="4480560" cy="274320"/>
           </a:xfrm>
           <a:prstGeom prst="rect">
             <a:avLst/>
@@ -6323,7 +6191,7 @@
                 </a:solidFill>
                 <a:latin typeface="Microsoft YaHei"/>
               </a:rPr>
-              <a:t>为什么是现在</a:t>
+              <a:t>关键痛点</a:t>
             </a:r>
           </a:p>
         </p:txBody>
@@ -6336,8 +6204,8 @@
         </p:nvSpPr>
         <p:spPr>
           <a:xfrm>
-            <a:off x="4681728" y="2606040"/>
-            <a:ext cx="2834640" cy="3246120"/>
+            <a:off x="6400800" y="2450592"/>
+            <a:ext cx="4572000" cy="1783080"/>
           </a:xfrm>
           <a:prstGeom prst="rect">
             <a:avLst/>
@@ -6345,7 +6213,7 @@
           <a:noFill/>
         </p:spPr>
         <p:txBody>
-          <a:bodyPr wrap="square" anchor="ctr">
+          <a:bodyPr wrap="square" anchor="t">
             <a:spAutoFit/>
           </a:bodyPr>
           <a:lstStyle/>
@@ -6362,7 +6230,39 @@
                 </a:solidFill>
                 <a:latin typeface="Microsoft YaHei"/>
               </a:rPr>
-              <a:t>企业通常已经沉淀了设备状态数据、历史工单和 FAQ，但这些资产分散在不同系统中，正适合通过 AI 工作台快速验证串联价值。</a:t>
+              <a:t>1. 设备状态、历史工单和知识资料彼此割裂，诊断定位慢</a:t>
+            </a:r>
+          </a:p>
+          <a:p>
+            <a:pPr algn="l">
+              <a:spcAft>
+                <a:spcPts val="800"/>
+              </a:spcAft>
+            </a:pPr>
+            <a:r>
+              <a:rPr sz="1450" b="0">
+                <a:solidFill>
+                  <a:srgbClr val="555555"/>
+                </a:solidFill>
+                <a:latin typeface="Microsoft YaHei"/>
+              </a:rPr>
+              <a:t>2. 客服定位问题慢，复杂问题升级频繁，首响效率受影响</a:t>
+            </a:r>
+          </a:p>
+          <a:p>
+            <a:pPr algn="l">
+              <a:spcAft>
+                <a:spcPts val="800"/>
+              </a:spcAft>
+            </a:pPr>
+            <a:r>
+              <a:rPr sz="1450" b="0">
+                <a:solidFill>
+                  <a:srgbClr val="555555"/>
+                </a:solidFill>
+                <a:latin typeface="Microsoft YaHei"/>
+              </a:rPr>
+              <a:t>3. 人工查资料和找专家的模式导致服务成本高且稳定性差</a:t>
             </a:r>
           </a:p>
         </p:txBody>
@@ -6375,8 +6275,8 @@
         </p:nvSpPr>
         <p:spPr>
           <a:xfrm>
-            <a:off x="8083296" y="1783080"/>
-            <a:ext cx="3209544" cy="4389120"/>
+            <a:off x="6172200" y="4983480"/>
+            <a:ext cx="5120640" cy="1143000"/>
           </a:xfrm>
           <a:prstGeom prst="roundRect">
             <a:avLst>
@@ -6384,12 +6284,10 @@
             </a:avLst>
           </a:prstGeom>
           <a:solidFill>
-            <a:srgbClr val="F8F4F4"/>
+            <a:srgbClr val="C62828"/>
           </a:solidFill>
-          <a:ln w="10160">
-            <a:solidFill>
-              <a:srgbClr val="E9DDDD"/>
-            </a:solidFill>
+          <a:ln>
+            <a:noFill/>
           </a:ln>
         </p:spPr>
         <p:style>
@@ -6411,6 +6309,7 @@
           <a:lstStyle/>
           <a:p>
             <a:pPr algn="ctr"/>
+            <a:endParaRPr/>
           </a:p>
         </p:txBody>
       </p:sp>
@@ -6422,47 +6321,8 @@
         </p:nvSpPr>
         <p:spPr>
           <a:xfrm>
-            <a:off x="8311896" y="2011680"/>
-            <a:ext cx="2752344" cy="274320"/>
-          </a:xfrm>
-          <a:prstGeom prst="rect">
-            <a:avLst/>
-          </a:prstGeom>
-          <a:noFill/>
-        </p:spPr>
-        <p:txBody>
-          <a:bodyPr wrap="square" anchor="t">
-            <a:spAutoFit/>
-          </a:bodyPr>
-          <a:lstStyle/>
-          <a:p>
-            <a:pPr algn="l">
-              <a:spcAft>
-                <a:spcPts val="0"/>
-              </a:spcAft>
-            </a:pPr>
-            <a:r>
-              <a:rPr sz="1650" b="1">
-                <a:solidFill>
-                  <a:srgbClr val="C62828"/>
-                </a:solidFill>
-                <a:latin typeface="Microsoft YaHei"/>
-              </a:rPr>
-              <a:t>价值支撑</a:t>
-            </a:r>
-          </a:p>
-        </p:txBody>
-      </p:sp>
-      <p:sp>
-        <p:nvSpPr>
-          <p:cNvPr id="13" name="TextBox 12"/>
-          <p:cNvSpPr txBox="1"/>
-          <p:nvPr/>
-        </p:nvSpPr>
-        <p:spPr>
-          <a:xfrm>
-            <a:off x="8311896" y="2606040"/>
-            <a:ext cx="2752344" cy="3246120"/>
+            <a:off x="6492240" y="5266944"/>
+            <a:ext cx="4480560" cy="384048"/>
           </a:xfrm>
           <a:prstGeom prst="rect">
             <a:avLst/>
@@ -6477,17 +6337,17 @@
           <a:p>
             <a:pPr algn="l">
               <a:spcAft>
-                <a:spcPts val="800"/>
-              </a:spcAft>
-            </a:pPr>
-            <a:r>
-              <a:rPr sz="1450" b="0">
-                <a:solidFill>
-                  <a:srgbClr val="555555"/>
-                </a:solidFill>
-                <a:latin typeface="Microsoft YaHei"/>
-              </a:rPr>
-              <a:t>服务体验正在成为消费电子品牌差异化的重要抓手</a:t>
+                <a:spcPts val="0"/>
+              </a:spcAft>
+            </a:pPr>
+            <a:r>
+              <a:rPr sz="1520" b="1">
+                <a:solidFill>
+                  <a:srgbClr val="FFFFFF"/>
+                </a:solidFill>
+                <a:latin typeface="Microsoft YaHei"/>
+              </a:rPr>
+              <a:t>优先切口：设备状态、历史工单和知识资料彼此割裂，诊断定位慢</a:t>
             </a:r>
           </a:p>
         </p:txBody>
@@ -6501,7 +6361,7 @@
 </file>
 
 <file path=ppt/slides/slide3.xml><?xml version="1.0" encoding="utf-8"?>
-<p:sld xmlns:a="http://schemas.openxmlformats.org/drawingml/2006/main" xmlns:p="http://schemas.openxmlformats.org/presentationml/2006/main" xmlns:r="http://schemas.openxmlformats.org/officeDocument/2006/relationships">
+<p:sld xmlns:a="http://schemas.openxmlformats.org/drawingml/2006/main" xmlns:r="http://schemas.openxmlformats.org/officeDocument/2006/relationships" xmlns:p="http://schemas.openxmlformats.org/presentationml/2006/main">
   <p:cSld>
     <p:bg>
       <p:bgPr>
@@ -6517,7 +6377,14 @@
         <p:cNvGrpSpPr/>
         <p:nvPr/>
       </p:nvGrpSpPr>
-      <p:grpSpPr/>
+      <p:grpSpPr>
+        <a:xfrm>
+          <a:off x="0" y="0"/>
+          <a:ext cx="0" cy="0"/>
+          <a:chOff x="0" y="0"/>
+          <a:chExt cx="0" cy="0"/>
+        </a:xfrm>
+      </p:grpSpPr>
       <p:sp>
         <p:nvSpPr>
           <p:cNvPr id="2" name="Rectangle 1"/>
@@ -6558,6 +6425,7 @@
           <a:lstStyle/>
           <a:p>
             <a:pPr algn="ctr"/>
+            <a:endParaRPr/>
           </a:p>
         </p:txBody>
       </p:sp>
@@ -6595,7 +6463,7 @@
                 </a:solidFill>
                 <a:latin typeface="Microsoft YaHei"/>
               </a:rPr>
-              <a:t>当前差距与优先痛点</a:t>
+              <a:t>业务机会与 Why Now</a:t>
             </a:r>
           </a:p>
         </p:txBody>
@@ -6640,6 +6508,7 @@
           <a:lstStyle/>
           <a:p>
             <a:pPr algn="ctr"/>
+            <a:endParaRPr/>
           </a:p>
         </p:txBody>
       </p:sp>
@@ -6651,8 +6520,8 @@
         </p:nvSpPr>
         <p:spPr>
           <a:xfrm>
-            <a:off x="822960" y="1737360"/>
-            <a:ext cx="5074920" cy="4389120"/>
+            <a:off x="822960" y="1783080"/>
+            <a:ext cx="3291840" cy="4389120"/>
           </a:xfrm>
           <a:prstGeom prst="roundRect">
             <a:avLst>
@@ -6687,6 +6556,7 @@
           <a:lstStyle/>
           <a:p>
             <a:pPr algn="ctr"/>
+            <a:endParaRPr/>
           </a:p>
         </p:txBody>
       </p:sp>
@@ -6698,8 +6568,8 @@
         </p:nvSpPr>
         <p:spPr>
           <a:xfrm>
-            <a:off x="1143000" y="1965960"/>
-            <a:ext cx="4434840" cy="274320"/>
+            <a:off x="1051560" y="2011680"/>
+            <a:ext cx="2834640" cy="274320"/>
           </a:xfrm>
           <a:prstGeom prst="rect">
             <a:avLst/>
@@ -6724,7 +6594,7 @@
                 </a:solidFill>
                 <a:latin typeface="Microsoft YaHei"/>
               </a:rPr>
-              <a:t>现状流程</a:t>
+              <a:t>机会判断</a:t>
             </a:r>
           </a:p>
         </p:txBody>
@@ -6737,8 +6607,8 @@
         </p:nvSpPr>
         <p:spPr>
           <a:xfrm>
-            <a:off x="1097280" y="2468880"/>
-            <a:ext cx="4526280" cy="3154680"/>
+            <a:off x="1051560" y="2606040"/>
+            <a:ext cx="2834640" cy="3246120"/>
           </a:xfrm>
           <a:prstGeom prst="rect">
             <a:avLst/>
@@ -6746,7 +6616,7 @@
           <a:noFill/>
         </p:spPr>
         <p:txBody>
-          <a:bodyPr wrap="square" anchor="t">
+          <a:bodyPr wrap="square" anchor="ctr">
             <a:spAutoFit/>
           </a:bodyPr>
           <a:lstStyle/>
@@ -6763,55 +6633,7 @@
                 </a:solidFill>
                 <a:latin typeface="Microsoft YaHei"/>
               </a:rPr>
-              <a:t>1. 客户报修后，客服需要人工确认设备型号、状态和问题描述</a:t>
-            </a:r>
-          </a:p>
-          <a:p>
-            <a:pPr algn="l">
-              <a:spcAft>
-                <a:spcPts val="800"/>
-              </a:spcAft>
-            </a:pPr>
-            <a:r>
-              <a:rPr sz="1450" b="0">
-                <a:solidFill>
-                  <a:srgbClr val="555555"/>
-                </a:solidFill>
-                <a:latin typeface="Microsoft YaHei"/>
-              </a:rPr>
-              <a:t>2. 客服切换多个系统查看历史工单、FAQ 和维修资料</a:t>
-            </a:r>
-          </a:p>
-          <a:p>
-            <a:pPr algn="l">
-              <a:spcAft>
-                <a:spcPts val="800"/>
-              </a:spcAft>
-            </a:pPr>
-            <a:r>
-              <a:rPr sz="1450" b="0">
-                <a:solidFill>
-                  <a:srgbClr val="555555"/>
-                </a:solidFill>
-                <a:latin typeface="Microsoft YaHei"/>
-              </a:rPr>
-              <a:t>3. 问题判断依赖个人经验，回复质量与处理速度波动较大</a:t>
-            </a:r>
-          </a:p>
-          <a:p>
-            <a:pPr algn="l">
-              <a:spcAft>
-                <a:spcPts val="800"/>
-              </a:spcAft>
-            </a:pPr>
-            <a:r>
-              <a:rPr sz="1450" b="0">
-                <a:solidFill>
-                  <a:srgbClr val="555555"/>
-                </a:solidFill>
-                <a:latin typeface="Microsoft YaHei"/>
-              </a:rPr>
-              <a:t>4. 复杂问题频繁升级专家或二线支持，服务链路变长</a:t>
+              <a:t>把传统售后从人工查资料、人工找专家升级为设备状态驱动的智能服务闭环，是消费电子 IoT 企业提升服务体验与运营效率的直接切口。</a:t>
             </a:r>
           </a:p>
         </p:txBody>
@@ -6824,8 +6646,8 @@
         </p:nvSpPr>
         <p:spPr>
           <a:xfrm>
-            <a:off x="6172200" y="1737360"/>
-            <a:ext cx="5120640" cy="3017520"/>
+            <a:off x="4453128" y="1783080"/>
+            <a:ext cx="3291840" cy="4389120"/>
           </a:xfrm>
           <a:prstGeom prst="roundRect">
             <a:avLst>
@@ -6860,6 +6682,7 @@
           <a:lstStyle/>
           <a:p>
             <a:pPr algn="ctr"/>
+            <a:endParaRPr/>
           </a:p>
         </p:txBody>
       </p:sp>
@@ -6871,8 +6694,8 @@
         </p:nvSpPr>
         <p:spPr>
           <a:xfrm>
-            <a:off x="6492240" y="1965960"/>
-            <a:ext cx="4480560" cy="274320"/>
+            <a:off x="4681728" y="2011680"/>
+            <a:ext cx="2834640" cy="274320"/>
           </a:xfrm>
           <a:prstGeom prst="rect">
             <a:avLst/>
@@ -6897,7 +6720,7 @@
                 </a:solidFill>
                 <a:latin typeface="Microsoft YaHei"/>
               </a:rPr>
-              <a:t>关键痛点</a:t>
+              <a:t>为什么是现在</a:t>
             </a:r>
           </a:p>
         </p:txBody>
@@ -6910,8 +6733,8 @@
         </p:nvSpPr>
         <p:spPr>
           <a:xfrm>
-            <a:off x="6400800" y="2450592"/>
-            <a:ext cx="4572000" cy="1783080"/>
+            <a:off x="4681728" y="2606040"/>
+            <a:ext cx="2834640" cy="3246120"/>
           </a:xfrm>
           <a:prstGeom prst="rect">
             <a:avLst/>
@@ -6919,7 +6742,7 @@
           <a:noFill/>
         </p:spPr>
         <p:txBody>
-          <a:bodyPr wrap="square" anchor="t">
+          <a:bodyPr wrap="square" anchor="ctr">
             <a:spAutoFit/>
           </a:bodyPr>
           <a:lstStyle/>
@@ -6936,39 +6759,7 @@
                 </a:solidFill>
                 <a:latin typeface="Microsoft YaHei"/>
               </a:rPr>
-              <a:t>1. 设备状态、历史工单和知识资料彼此割裂，诊断定位慢</a:t>
-            </a:r>
-          </a:p>
-          <a:p>
-            <a:pPr algn="l">
-              <a:spcAft>
-                <a:spcPts val="800"/>
-              </a:spcAft>
-            </a:pPr>
-            <a:r>
-              <a:rPr sz="1450" b="0">
-                <a:solidFill>
-                  <a:srgbClr val="555555"/>
-                </a:solidFill>
-                <a:latin typeface="Microsoft YaHei"/>
-              </a:rPr>
-              <a:t>2. 客服定位问题慢，复杂问题升级频繁，首响效率受影响</a:t>
-            </a:r>
-          </a:p>
-          <a:p>
-            <a:pPr algn="l">
-              <a:spcAft>
-                <a:spcPts val="800"/>
-              </a:spcAft>
-            </a:pPr>
-            <a:r>
-              <a:rPr sz="1450" b="0">
-                <a:solidFill>
-                  <a:srgbClr val="555555"/>
-                </a:solidFill>
-                <a:latin typeface="Microsoft YaHei"/>
-              </a:rPr>
-              <a:t>3. 人工查资料和找专家的模式导致服务成本高且稳定性差</a:t>
+              <a:t>企业通常已经沉淀了设备状态数据、历史工单和 FAQ，但这些资产分散在不同系统中，正适合通过 AI 工作台快速验证串联价值。</a:t>
             </a:r>
           </a:p>
         </p:txBody>
@@ -6981,8 +6772,8 @@
         </p:nvSpPr>
         <p:spPr>
           <a:xfrm>
-            <a:off x="6172200" y="4983480"/>
-            <a:ext cx="5120640" cy="1143000"/>
+            <a:off x="8083296" y="1783080"/>
+            <a:ext cx="3209544" cy="4389120"/>
           </a:xfrm>
           <a:prstGeom prst="roundRect">
             <a:avLst>
@@ -6990,10 +6781,12 @@
             </a:avLst>
           </a:prstGeom>
           <a:solidFill>
-            <a:srgbClr val="C62828"/>
+            <a:srgbClr val="F8F4F4"/>
           </a:solidFill>
-          <a:ln>
-            <a:noFill/>
+          <a:ln w="10160">
+            <a:solidFill>
+              <a:srgbClr val="E9DDDD"/>
+            </a:solidFill>
           </a:ln>
         </p:spPr>
         <p:style>
@@ -7015,6 +6808,7 @@
           <a:lstStyle/>
           <a:p>
             <a:pPr algn="ctr"/>
+            <a:endParaRPr/>
           </a:p>
         </p:txBody>
       </p:sp>
@@ -7026,8 +6820,47 @@
         </p:nvSpPr>
         <p:spPr>
           <a:xfrm>
-            <a:off x="6492240" y="5266944"/>
-            <a:ext cx="4480560" cy="384048"/>
+            <a:off x="8311896" y="2011680"/>
+            <a:ext cx="2752344" cy="274320"/>
+          </a:xfrm>
+          <a:prstGeom prst="rect">
+            <a:avLst/>
+          </a:prstGeom>
+          <a:noFill/>
+        </p:spPr>
+        <p:txBody>
+          <a:bodyPr wrap="square" anchor="t">
+            <a:spAutoFit/>
+          </a:bodyPr>
+          <a:lstStyle/>
+          <a:p>
+            <a:pPr algn="l">
+              <a:spcAft>
+                <a:spcPts val="0"/>
+              </a:spcAft>
+            </a:pPr>
+            <a:r>
+              <a:rPr sz="1650" b="1">
+                <a:solidFill>
+                  <a:srgbClr val="C62828"/>
+                </a:solidFill>
+                <a:latin typeface="Microsoft YaHei"/>
+              </a:rPr>
+              <a:t>价值支撑</a:t>
+            </a:r>
+          </a:p>
+        </p:txBody>
+      </p:sp>
+      <p:sp>
+        <p:nvSpPr>
+          <p:cNvPr id="13" name="TextBox 12"/>
+          <p:cNvSpPr txBox="1"/>
+          <p:nvPr/>
+        </p:nvSpPr>
+        <p:spPr>
+          <a:xfrm>
+            <a:off x="8311896" y="2606040"/>
+            <a:ext cx="2752344" cy="3246120"/>
           </a:xfrm>
           <a:prstGeom prst="rect">
             <a:avLst/>
@@ -7042,17 +6875,17 @@
           <a:p>
             <a:pPr algn="l">
               <a:spcAft>
-                <a:spcPts val="0"/>
-              </a:spcAft>
-            </a:pPr>
-            <a:r>
-              <a:rPr sz="1520" b="1">
-                <a:solidFill>
-                  <a:srgbClr val="FFFFFF"/>
-                </a:solidFill>
-                <a:latin typeface="Microsoft YaHei"/>
-              </a:rPr>
-              <a:t>优先切口：设备状态、历史工单和知识资料彼此割裂，诊断定位慢</a:t>
+                <a:spcPts val="800"/>
+              </a:spcAft>
+            </a:pPr>
+            <a:r>
+              <a:rPr sz="1450" b="0">
+                <a:solidFill>
+                  <a:srgbClr val="555555"/>
+                </a:solidFill>
+                <a:latin typeface="Microsoft YaHei"/>
+              </a:rPr>
+              <a:t>服务体验正在成为消费电子品牌差异化的重要抓手</a:t>
             </a:r>
           </a:p>
         </p:txBody>
@@ -7066,7 +6899,7 @@
 </file>
 
 <file path=ppt/slides/slide4.xml><?xml version="1.0" encoding="utf-8"?>
-<p:sld xmlns:a="http://schemas.openxmlformats.org/drawingml/2006/main" xmlns:p="http://schemas.openxmlformats.org/presentationml/2006/main" xmlns:r="http://schemas.openxmlformats.org/officeDocument/2006/relationships">
+<p:sld xmlns:a="http://schemas.openxmlformats.org/drawingml/2006/main" xmlns:r="http://schemas.openxmlformats.org/officeDocument/2006/relationships" xmlns:p="http://schemas.openxmlformats.org/presentationml/2006/main">
   <p:cSld>
     <p:bg>
       <p:bgPr>
@@ -7082,7 +6915,14 @@
         <p:cNvGrpSpPr/>
         <p:nvPr/>
       </p:nvGrpSpPr>
-      <p:grpSpPr/>
+      <p:grpSpPr>
+        <a:xfrm>
+          <a:off x="0" y="0"/>
+          <a:ext cx="0" cy="0"/>
+          <a:chOff x="0" y="0"/>
+          <a:chExt cx="0" cy="0"/>
+        </a:xfrm>
+      </p:grpSpPr>
       <p:sp>
         <p:nvSpPr>
           <p:cNvPr id="2" name="Rectangle 1"/>
@@ -7123,6 +6963,7 @@
           <a:lstStyle/>
           <a:p>
             <a:pPr algn="ctr"/>
+            <a:endParaRPr/>
           </a:p>
         </p:txBody>
       </p:sp>
@@ -7205,6 +7046,7 @@
           <a:lstStyle/>
           <a:p>
             <a:pPr algn="ctr"/>
+            <a:endParaRPr/>
           </a:p>
         </p:txBody>
       </p:sp>
@@ -7252,6 +7094,7 @@
           <a:lstStyle/>
           <a:p>
             <a:pPr algn="ctr"/>
+            <a:endParaRPr/>
           </a:p>
         </p:txBody>
       </p:sp>
@@ -7297,6 +7140,7 @@
           <a:lstStyle/>
           <a:p>
             <a:pPr algn="ctr"/>
+            <a:endParaRPr/>
           </a:p>
         </p:txBody>
       </p:sp>
@@ -7383,6 +7227,7 @@
           <a:lstStyle/>
           <a:p>
             <a:pPr algn="ctr"/>
+            <a:endParaRPr/>
           </a:p>
         </p:txBody>
       </p:sp>
@@ -7465,6 +7310,7 @@
           <a:lstStyle/>
           <a:p>
             <a:pPr algn="ctr"/>
+            <a:endParaRPr/>
           </a:p>
         </p:txBody>
       </p:sp>
@@ -7512,6 +7358,7 @@
           <a:lstStyle/>
           <a:p>
             <a:pPr algn="ctr"/>
+            <a:endParaRPr/>
           </a:p>
         </p:txBody>
       </p:sp>
@@ -7596,6 +7443,7 @@
           <a:lstStyle/>
           <a:p>
             <a:pPr algn="ctr"/>
+            <a:endParaRPr/>
           </a:p>
         </p:txBody>
       </p:sp>
@@ -7682,6 +7530,7 @@
           <a:lstStyle/>
           <a:p>
             <a:pPr algn="ctr"/>
+            <a:endParaRPr/>
           </a:p>
         </p:txBody>
       </p:sp>
@@ -7764,6 +7613,7 @@
           <a:lstStyle/>
           <a:p>
             <a:pPr algn="ctr"/>
+            <a:endParaRPr/>
           </a:p>
         </p:txBody>
       </p:sp>
@@ -7811,6 +7661,7 @@
           <a:lstStyle/>
           <a:p>
             <a:pPr algn="ctr"/>
+            <a:endParaRPr/>
           </a:p>
         </p:txBody>
       </p:sp>
@@ -7895,6 +7746,7 @@
           <a:lstStyle/>
           <a:p>
             <a:pPr algn="ctr"/>
+            <a:endParaRPr/>
           </a:p>
         </p:txBody>
       </p:sp>
@@ -7981,6 +7833,7 @@
           <a:lstStyle/>
           <a:p>
             <a:pPr algn="ctr"/>
+            <a:endParaRPr/>
           </a:p>
         </p:txBody>
       </p:sp>
@@ -8063,6 +7916,7 @@
           <a:lstStyle/>
           <a:p>
             <a:pPr algn="ctr"/>
+            <a:endParaRPr/>
           </a:p>
         </p:txBody>
       </p:sp>
@@ -8110,6 +7964,7 @@
           <a:lstStyle/>
           <a:p>
             <a:pPr algn="ctr"/>
+            <a:endParaRPr/>
           </a:p>
         </p:txBody>
       </p:sp>
@@ -8192,6 +8047,7 @@
           <a:lstStyle/>
           <a:p>
             <a:pPr algn="ctr"/>
+            <a:endParaRPr/>
           </a:p>
         </p:txBody>
       </p:sp>
@@ -8239,6 +8095,7 @@
           <a:lstStyle/>
           <a:p>
             <a:pPr algn="ctr"/>
+            <a:endParaRPr/>
           </a:p>
         </p:txBody>
       </p:sp>
@@ -8321,6 +8178,7 @@
           <a:lstStyle/>
           <a:p>
             <a:pPr algn="ctr"/>
+            <a:endParaRPr/>
           </a:p>
         </p:txBody>
       </p:sp>
@@ -8368,6 +8226,7 @@
           <a:lstStyle/>
           <a:p>
             <a:pPr algn="ctr"/>
+            <a:endParaRPr/>
           </a:p>
         </p:txBody>
       </p:sp>
@@ -8450,6 +8309,7 @@
           <a:lstStyle/>
           <a:p>
             <a:pPr algn="ctr"/>
+            <a:endParaRPr/>
           </a:p>
         </p:txBody>
       </p:sp>
@@ -8497,6 +8357,7 @@
           <a:lstStyle/>
           <a:p>
             <a:pPr algn="ctr"/>
+            <a:endParaRPr/>
           </a:p>
         </p:txBody>
       </p:sp>
@@ -8579,6 +8440,7 @@
           <a:lstStyle/>
           <a:p>
             <a:pPr algn="ctr"/>
+            <a:endParaRPr/>
           </a:p>
         </p:txBody>
       </p:sp>
@@ -8626,6 +8488,7 @@
           <a:lstStyle/>
           <a:p>
             <a:pPr algn="ctr"/>
+            <a:endParaRPr/>
           </a:p>
         </p:txBody>
       </p:sp>
@@ -8677,7 +8540,7 @@
 </file>
 
 <file path=ppt/slides/slide5.xml><?xml version="1.0" encoding="utf-8"?>
-<p:sld xmlns:a="http://schemas.openxmlformats.org/drawingml/2006/main" xmlns:p="http://schemas.openxmlformats.org/presentationml/2006/main" xmlns:r="http://schemas.openxmlformats.org/officeDocument/2006/relationships">
+<p:sld xmlns:a="http://schemas.openxmlformats.org/drawingml/2006/main" xmlns:r="http://schemas.openxmlformats.org/officeDocument/2006/relationships" xmlns:p="http://schemas.openxmlformats.org/presentationml/2006/main">
   <p:cSld>
     <p:bg>
       <p:bgPr>
@@ -8693,7 +8556,14 @@
         <p:cNvGrpSpPr/>
         <p:nvPr/>
       </p:nvGrpSpPr>
-      <p:grpSpPr/>
+      <p:grpSpPr>
+        <a:xfrm>
+          <a:off x="0" y="0"/>
+          <a:ext cx="0" cy="0"/>
+          <a:chOff x="0" y="0"/>
+          <a:chExt cx="0" cy="0"/>
+        </a:xfrm>
+      </p:grpSpPr>
       <p:sp>
         <p:nvSpPr>
           <p:cNvPr id="2" name="Rectangle 1"/>
@@ -8734,6 +8604,7 @@
           <a:lstStyle/>
           <a:p>
             <a:pPr algn="ctr"/>
+            <a:endParaRPr/>
           </a:p>
         </p:txBody>
       </p:sp>
@@ -8816,6 +8687,7 @@
           <a:lstStyle/>
           <a:p>
             <a:pPr algn="ctr"/>
+            <a:endParaRPr/>
           </a:p>
         </p:txBody>
       </p:sp>
@@ -8861,6 +8733,7 @@
           <a:lstStyle/>
           <a:p>
             <a:pPr algn="ctr"/>
+            <a:endParaRPr/>
           </a:p>
         </p:txBody>
       </p:sp>
@@ -8986,6 +8859,7 @@
           <a:lstStyle/>
           <a:p>
             <a:pPr algn="ctr"/>
+            <a:endParaRPr/>
           </a:p>
         </p:txBody>
       </p:sp>
@@ -9173,6 +9047,7 @@
           <a:lstStyle/>
           <a:p>
             <a:pPr algn="ctr"/>
+            <a:endParaRPr/>
           </a:p>
         </p:txBody>
       </p:sp>
@@ -9263,7 +9138,7 @@
 </file>
 
 <file path=ppt/slides/slide6.xml><?xml version="1.0" encoding="utf-8"?>
-<p:sld xmlns:a="http://schemas.openxmlformats.org/drawingml/2006/main" xmlns:p="http://schemas.openxmlformats.org/presentationml/2006/main" xmlns:r="http://schemas.openxmlformats.org/officeDocument/2006/relationships">
+<p:sld xmlns:a="http://schemas.openxmlformats.org/drawingml/2006/main" xmlns:r="http://schemas.openxmlformats.org/officeDocument/2006/relationships" xmlns:p="http://schemas.openxmlformats.org/presentationml/2006/main">
   <p:cSld>
     <p:bg>
       <p:bgPr>
@@ -9279,7 +9154,14 @@
         <p:cNvGrpSpPr/>
         <p:nvPr/>
       </p:nvGrpSpPr>
-      <p:grpSpPr/>
+      <p:grpSpPr>
+        <a:xfrm>
+          <a:off x="0" y="0"/>
+          <a:ext cx="0" cy="0"/>
+          <a:chOff x="0" y="0"/>
+          <a:chExt cx="0" cy="0"/>
+        </a:xfrm>
+      </p:grpSpPr>
       <p:sp>
         <p:nvSpPr>
           <p:cNvPr id="2" name="Rectangle 1"/>
@@ -9320,6 +9202,7 @@
           <a:lstStyle/>
           <a:p>
             <a:pPr algn="ctr"/>
+            <a:endParaRPr/>
           </a:p>
         </p:txBody>
       </p:sp>
@@ -9402,6 +9285,7 @@
           <a:lstStyle/>
           <a:p>
             <a:pPr algn="ctr"/>
+            <a:endParaRPr/>
           </a:p>
         </p:txBody>
       </p:sp>
@@ -9449,6 +9333,7 @@
           <a:lstStyle/>
           <a:p>
             <a:pPr algn="ctr"/>
+            <a:endParaRPr/>
           </a:p>
         </p:txBody>
       </p:sp>
@@ -9574,6 +9459,7 @@
           <a:lstStyle/>
           <a:p>
             <a:pPr algn="ctr"/>
+            <a:endParaRPr/>
           </a:p>
         </p:txBody>
       </p:sp>
@@ -9699,6 +9585,7 @@
           <a:lstStyle/>
           <a:p>
             <a:pPr algn="ctr"/>
+            <a:endParaRPr/>
           </a:p>
         </p:txBody>
       </p:sp>
@@ -9824,6 +9711,7 @@
           <a:lstStyle/>
           <a:p>
             <a:pPr algn="ctr"/>
+            <a:endParaRPr/>
           </a:p>
         </p:txBody>
       </p:sp>
@@ -9981,6 +9869,7 @@
           <a:lstStyle/>
           <a:p>
             <a:pPr algn="ctr"/>
+            <a:endParaRPr/>
           </a:p>
         </p:txBody>
       </p:sp>
@@ -10103,7 +9992,7 @@
 </file>
 
 <file path=ppt/slides/slide7.xml><?xml version="1.0" encoding="utf-8"?>
-<p:sld xmlns:a="http://schemas.openxmlformats.org/drawingml/2006/main" xmlns:p="http://schemas.openxmlformats.org/presentationml/2006/main" xmlns:r="http://schemas.openxmlformats.org/officeDocument/2006/relationships">
+<p:sld xmlns:a="http://schemas.openxmlformats.org/drawingml/2006/main" xmlns:r="http://schemas.openxmlformats.org/officeDocument/2006/relationships" xmlns:p="http://schemas.openxmlformats.org/presentationml/2006/main">
   <p:cSld>
     <p:bg>
       <p:bgPr>
@@ -10119,7 +10008,14 @@
         <p:cNvGrpSpPr/>
         <p:nvPr/>
       </p:nvGrpSpPr>
-      <p:grpSpPr/>
+      <p:grpSpPr>
+        <a:xfrm>
+          <a:off x="0" y="0"/>
+          <a:ext cx="0" cy="0"/>
+          <a:chOff x="0" y="0"/>
+          <a:chExt cx="0" cy="0"/>
+        </a:xfrm>
+      </p:grpSpPr>
       <p:sp>
         <p:nvSpPr>
           <p:cNvPr id="2" name="Rectangle 1"/>
@@ -10160,6 +10056,7 @@
           <a:lstStyle/>
           <a:p>
             <a:pPr algn="ctr"/>
+            <a:endParaRPr/>
           </a:p>
         </p:txBody>
       </p:sp>
@@ -10242,6 +10139,7 @@
           <a:lstStyle/>
           <a:p>
             <a:pPr algn="ctr"/>
+            <a:endParaRPr/>
           </a:p>
         </p:txBody>
       </p:sp>
@@ -10289,6 +10187,7 @@
           <a:lstStyle/>
           <a:p>
             <a:pPr algn="ctr"/>
+            <a:endParaRPr/>
           </a:p>
         </p:txBody>
       </p:sp>
@@ -10414,6 +10313,7 @@
           <a:lstStyle/>
           <a:p>
             <a:pPr algn="ctr"/>
+            <a:endParaRPr/>
           </a:p>
         </p:txBody>
       </p:sp>
@@ -10539,6 +10439,7 @@
           <a:lstStyle/>
           <a:p>
             <a:pPr algn="ctr"/>
+            <a:endParaRPr/>
           </a:p>
         </p:txBody>
       </p:sp>
@@ -10664,6 +10565,7 @@
           <a:lstStyle/>
           <a:p>
             <a:pPr algn="ctr"/>
+            <a:endParaRPr/>
           </a:p>
         </p:txBody>
       </p:sp>
@@ -10821,6 +10723,7 @@
           <a:lstStyle/>
           <a:p>
             <a:pPr algn="ctr"/>
+            <a:endParaRPr/>
           </a:p>
         </p:txBody>
       </p:sp>
@@ -10959,7 +10862,7 @@
 </file>
 
 <file path=ppt/slides/slide8.xml><?xml version="1.0" encoding="utf-8"?>
-<p:sld xmlns:a="http://schemas.openxmlformats.org/drawingml/2006/main" xmlns:p="http://schemas.openxmlformats.org/presentationml/2006/main" xmlns:r="http://schemas.openxmlformats.org/officeDocument/2006/relationships">
+<p:sld xmlns:a="http://schemas.openxmlformats.org/drawingml/2006/main" xmlns:r="http://schemas.openxmlformats.org/officeDocument/2006/relationships" xmlns:p="http://schemas.openxmlformats.org/presentationml/2006/main">
   <p:cSld>
     <p:bg>
       <p:bgPr>
@@ -10975,7 +10878,14 @@
         <p:cNvGrpSpPr/>
         <p:nvPr/>
       </p:nvGrpSpPr>
-      <p:grpSpPr/>
+      <p:grpSpPr>
+        <a:xfrm>
+          <a:off x="0" y="0"/>
+          <a:ext cx="0" cy="0"/>
+          <a:chOff x="0" y="0"/>
+          <a:chExt cx="0" cy="0"/>
+        </a:xfrm>
+      </p:grpSpPr>
       <p:sp>
         <p:nvSpPr>
           <p:cNvPr id="2" name="Rectangle 1"/>
@@ -11016,6 +10926,7 @@
           <a:lstStyle/>
           <a:p>
             <a:pPr algn="ctr"/>
+            <a:endParaRPr/>
           </a:p>
         </p:txBody>
       </p:sp>
@@ -11098,6 +11009,7 @@
           <a:lstStyle/>
           <a:p>
             <a:pPr algn="ctr"/>
+            <a:endParaRPr/>
           </a:p>
         </p:txBody>
       </p:sp>
@@ -11145,6 +11057,7 @@
           <a:lstStyle/>
           <a:p>
             <a:pPr algn="ctr"/>
+            <a:endParaRPr/>
           </a:p>
         </p:txBody>
       </p:sp>
@@ -11270,6 +11183,7 @@
           <a:lstStyle/>
           <a:p>
             <a:pPr algn="ctr"/>
+            <a:endParaRPr/>
           </a:p>
         </p:txBody>
       </p:sp>
@@ -11395,6 +11309,7 @@
           <a:lstStyle/>
           <a:p>
             <a:pPr algn="ctr"/>
+            <a:endParaRPr/>
           </a:p>
         </p:txBody>
       </p:sp>
@@ -11520,6 +11435,7 @@
           <a:lstStyle/>
           <a:p>
             <a:pPr algn="ctr"/>
+            <a:endParaRPr/>
           </a:p>
         </p:txBody>
       </p:sp>
@@ -11693,6 +11609,7 @@
           <a:lstStyle/>
           <a:p>
             <a:pPr algn="ctr"/>
+            <a:endParaRPr/>
           </a:p>
         </p:txBody>
       </p:sp>
@@ -11831,7 +11748,7 @@
 </file>
 
 <file path=ppt/slides/slide9.xml><?xml version="1.0" encoding="utf-8"?>
-<p:sld xmlns:a="http://schemas.openxmlformats.org/drawingml/2006/main" xmlns:p="http://schemas.openxmlformats.org/presentationml/2006/main" xmlns:r="http://schemas.openxmlformats.org/officeDocument/2006/relationships">
+<p:sld xmlns:a="http://schemas.openxmlformats.org/drawingml/2006/main" xmlns:r="http://schemas.openxmlformats.org/officeDocument/2006/relationships" xmlns:p="http://schemas.openxmlformats.org/presentationml/2006/main">
   <p:cSld>
     <p:bg>
       <p:bgPr>
@@ -11847,7 +11764,14 @@
         <p:cNvGrpSpPr/>
         <p:nvPr/>
       </p:nvGrpSpPr>
-      <p:grpSpPr/>
+      <p:grpSpPr>
+        <a:xfrm>
+          <a:off x="0" y="0"/>
+          <a:ext cx="0" cy="0"/>
+          <a:chOff x="0" y="0"/>
+          <a:chExt cx="0" cy="0"/>
+        </a:xfrm>
+      </p:grpSpPr>
       <p:sp>
         <p:nvSpPr>
           <p:cNvPr id="2" name="Rectangle 1"/>
@@ -11888,6 +11812,7 @@
           <a:lstStyle/>
           <a:p>
             <a:pPr algn="ctr"/>
+            <a:endParaRPr/>
           </a:p>
         </p:txBody>
       </p:sp>
@@ -11970,6 +11895,7 @@
           <a:lstStyle/>
           <a:p>
             <a:pPr algn="ctr"/>
+            <a:endParaRPr/>
           </a:p>
         </p:txBody>
       </p:sp>
@@ -12017,6 +11943,7 @@
           <a:lstStyle/>
           <a:p>
             <a:pPr algn="ctr"/>
+            <a:endParaRPr/>
           </a:p>
         </p:txBody>
       </p:sp>
@@ -12174,6 +12101,7 @@
           <a:lstStyle/>
           <a:p>
             <a:pPr algn="ctr"/>
+            <a:endParaRPr/>
           </a:p>
         </p:txBody>
       </p:sp>
@@ -12297,6 +12225,7 @@
           <a:lstStyle/>
           <a:p>
             <a:pPr algn="ctr"/>
+            <a:endParaRPr/>
           </a:p>
         </p:txBody>
       </p:sp>
@@ -12707,7 +12636,7 @@
 </file>
 
 <file path=ppt/theme/theme2.xml><?xml version="1.0" encoding="utf-8"?>
-<a:theme xmlns:a="http://schemas.openxmlformats.org/drawingml/2006/main" name="Office Theme">
+<a:theme xmlns:a="http://schemas.openxmlformats.org/drawingml/2006/main" name="Office 主题​​">
   <a:themeElements>
     <a:clrScheme name="Office">
       <a:dk1>
@@ -12717,44 +12646,44 @@
         <a:sysClr val="window" lastClr="FFFFFF"/>
       </a:lt1>
       <a:dk2>
-        <a:srgbClr val="1F497D"/>
+        <a:srgbClr val="0E2841"/>
       </a:dk2>
       <a:lt2>
-        <a:srgbClr val="EEECE1"/>
+        <a:srgbClr val="E8E8E8"/>
       </a:lt2>
       <a:accent1>
-        <a:srgbClr val="4F81BD"/>
+        <a:srgbClr val="156082"/>
       </a:accent1>
       <a:accent2>
-        <a:srgbClr val="C0504D"/>
+        <a:srgbClr val="E97132"/>
       </a:accent2>
       <a:accent3>
-        <a:srgbClr val="9BBB59"/>
+        <a:srgbClr val="196B24"/>
       </a:accent3>
       <a:accent4>
-        <a:srgbClr val="8064A2"/>
+        <a:srgbClr val="0F9ED5"/>
       </a:accent4>
       <a:accent5>
-        <a:srgbClr val="4BACC6"/>
+        <a:srgbClr val="A02B93"/>
       </a:accent5>
       <a:accent6>
-        <a:srgbClr val="F79646"/>
+        <a:srgbClr val="4EA72E"/>
       </a:accent6>
       <a:hlink>
-        <a:srgbClr val="0000FF"/>
+        <a:srgbClr val="467886"/>
       </a:hlink>
       <a:folHlink>
-        <a:srgbClr val="800080"/>
+        <a:srgbClr val="96607D"/>
       </a:folHlink>
     </a:clrScheme>
     <a:fontScheme name="Office">
       <a:majorFont>
-        <a:latin typeface="Calibri"/>
+        <a:latin typeface="等线 Light" panose="02110004020202020204"/>
         <a:ea typeface=""/>
         <a:cs typeface=""/>
-        <a:font script="Jpan" typeface="ＭＳ Ｐゴシック"/>
+        <a:font script="Jpan" typeface="游ゴシック Light"/>
         <a:font script="Hang" typeface="맑은 고딕"/>
-        <a:font script="Hans" typeface="宋体"/>
+        <a:font script="Hans" typeface="等线 Light"/>
         <a:font script="Hant" typeface="新細明體"/>
         <a:font script="Arab" typeface="Times New Roman"/>
         <a:font script="Hebr" typeface="Times New Roman"/>
@@ -12782,14 +12711,31 @@
         <a:font script="Viet" typeface="Times New Roman"/>
         <a:font script="Uigh" typeface="Microsoft Uighur"/>
         <a:font script="Geor" typeface="Sylfaen"/>
+        <a:font script="Armn" typeface="Arial"/>
+        <a:font script="Bugi" typeface="Leelawadee UI"/>
+        <a:font script="Bopo" typeface="Microsoft JhengHei"/>
+        <a:font script="Java" typeface="Javanese Text"/>
+        <a:font script="Lisu" typeface="Segoe UI"/>
+        <a:font script="Mymr" typeface="Myanmar Text"/>
+        <a:font script="Nkoo" typeface="Ebrima"/>
+        <a:font script="Olck" typeface="Nirmala UI"/>
+        <a:font script="Osma" typeface="Ebrima"/>
+        <a:font script="Phag" typeface="Phagspa"/>
+        <a:font script="Syrn" typeface="Estrangelo Edessa"/>
+        <a:font script="Syrj" typeface="Estrangelo Edessa"/>
+        <a:font script="Syre" typeface="Estrangelo Edessa"/>
+        <a:font script="Sora" typeface="Nirmala UI"/>
+        <a:font script="Tale" typeface="Microsoft Tai Le"/>
+        <a:font script="Talu" typeface="Microsoft New Tai Lue"/>
+        <a:font script="Tfng" typeface="Ebrima"/>
       </a:majorFont>
       <a:minorFont>
-        <a:latin typeface="Calibri"/>
+        <a:latin typeface="等线" panose="02110004020202020204"/>
         <a:ea typeface=""/>
         <a:cs typeface=""/>
-        <a:font script="Jpan" typeface="ＭＳ Ｐゴシック"/>
+        <a:font script="Jpan" typeface="游ゴシック"/>
         <a:font script="Hang" typeface="맑은 고딕"/>
-        <a:font script="Hans" typeface="宋体"/>
+        <a:font script="Hans" typeface="等线"/>
         <a:font script="Hant" typeface="新細明體"/>
         <a:font script="Arab" typeface="Arial"/>
         <a:font script="Hebr" typeface="Arial"/>
@@ -12817,6 +12763,23 @@
         <a:font script="Viet" typeface="Arial"/>
         <a:font script="Uigh" typeface="Microsoft Uighur"/>
         <a:font script="Geor" typeface="Sylfaen"/>
+        <a:font script="Armn" typeface="Arial"/>
+        <a:font script="Bugi" typeface="Leelawadee UI"/>
+        <a:font script="Bopo" typeface="Microsoft JhengHei"/>
+        <a:font script="Java" typeface="Javanese Text"/>
+        <a:font script="Lisu" typeface="Segoe UI"/>
+        <a:font script="Mymr" typeface="Myanmar Text"/>
+        <a:font script="Nkoo" typeface="Ebrima"/>
+        <a:font script="Olck" typeface="Nirmala UI"/>
+        <a:font script="Osma" typeface="Ebrima"/>
+        <a:font script="Phag" typeface="Phagspa"/>
+        <a:font script="Syrn" typeface="Estrangelo Edessa"/>
+        <a:font script="Syrj" typeface="Estrangelo Edessa"/>
+        <a:font script="Syre" typeface="Estrangelo Edessa"/>
+        <a:font script="Sora" typeface="Nirmala UI"/>
+        <a:font script="Tale" typeface="Microsoft Tai Le"/>
+        <a:font script="Talu" typeface="Microsoft New Tai Lue"/>
+        <a:font script="Tfng" typeface="Ebrima"/>
       </a:minorFont>
     </a:fontScheme>
     <a:fmtScheme name="Office">
@@ -12828,180 +12791,136 @@
           <a:gsLst>
             <a:gs pos="0">
               <a:schemeClr val="phClr">
-                <a:tint val="50000"/>
-                <a:satMod val="300000"/>
+                <a:lumMod val="110000"/>
+                <a:satMod val="105000"/>
+                <a:tint val="67000"/>
               </a:schemeClr>
             </a:gs>
-            <a:gs pos="35000">
+            <a:gs pos="50000">
               <a:schemeClr val="phClr">
-                <a:tint val="37000"/>
-                <a:satMod val="300000"/>
+                <a:lumMod val="105000"/>
+                <a:satMod val="103000"/>
+                <a:tint val="73000"/>
               </a:schemeClr>
             </a:gs>
             <a:gs pos="100000">
               <a:schemeClr val="phClr">
-                <a:tint val="15000"/>
-                <a:satMod val="350000"/>
+                <a:lumMod val="105000"/>
+                <a:satMod val="109000"/>
+                <a:tint val="81000"/>
               </a:schemeClr>
             </a:gs>
           </a:gsLst>
-          <a:lin ang="16200000" scaled="1"/>
+          <a:lin ang="5400000" scaled="0"/>
         </a:gradFill>
         <a:gradFill rotWithShape="1">
           <a:gsLst>
             <a:gs pos="0">
               <a:schemeClr val="phClr">
-                <a:tint val="100000"/>
+                <a:satMod val="103000"/>
+                <a:lumMod val="102000"/>
+                <a:tint val="94000"/>
+              </a:schemeClr>
+            </a:gs>
+            <a:gs pos="50000">
+              <a:schemeClr val="phClr">
+                <a:satMod val="110000"/>
+                <a:lumMod val="100000"/>
                 <a:shade val="100000"/>
-                <a:satMod val="130000"/>
               </a:schemeClr>
             </a:gs>
             <a:gs pos="100000">
               <a:schemeClr val="phClr">
-                <a:tint val="50000"/>
-                <a:shade val="100000"/>
-                <a:satMod val="350000"/>
+                <a:lumMod val="99000"/>
+                <a:satMod val="120000"/>
+                <a:shade val="78000"/>
               </a:schemeClr>
             </a:gs>
           </a:gsLst>
-          <a:lin ang="16200000" scaled="0"/>
+          <a:lin ang="5400000" scaled="0"/>
         </a:gradFill>
       </a:fillStyleLst>
       <a:lnStyleLst>
-        <a:ln w="9525" cap="flat" cmpd="sng" algn="ctr">
+        <a:ln w="12700" cap="flat" cmpd="sng" algn="ctr">
           <a:solidFill>
-            <a:schemeClr val="phClr">
-              <a:shade val="95000"/>
-              <a:satMod val="105000"/>
-            </a:schemeClr>
+            <a:schemeClr val="phClr"/>
           </a:solidFill>
           <a:prstDash val="solid"/>
+          <a:miter lim="800000"/>
+        </a:ln>
+        <a:ln w="19050" cap="flat" cmpd="sng" algn="ctr">
+          <a:solidFill>
+            <a:schemeClr val="phClr"/>
+          </a:solidFill>
+          <a:prstDash val="solid"/>
+          <a:miter lim="800000"/>
         </a:ln>
         <a:ln w="25400" cap="flat" cmpd="sng" algn="ctr">
           <a:solidFill>
             <a:schemeClr val="phClr"/>
           </a:solidFill>
           <a:prstDash val="solid"/>
-        </a:ln>
-        <a:ln w="38100" cap="flat" cmpd="sng" algn="ctr">
-          <a:solidFill>
-            <a:schemeClr val="phClr"/>
-          </a:solidFill>
-          <a:prstDash val="solid"/>
+          <a:miter lim="800000"/>
         </a:ln>
       </a:lnStyleLst>
       <a:effectStyleLst>
         <a:effectStyle>
+          <a:effectLst/>
+        </a:effectStyle>
+        <a:effectStyle>
+          <a:effectLst/>
+        </a:effectStyle>
+        <a:effectStyle>
           <a:effectLst>
-            <a:outerShdw blurRad="40000" dist="20000" dir="5400000" rotWithShape="0">
+            <a:outerShdw blurRad="57150" dist="19050" dir="5400000" algn="ctr" rotWithShape="0">
               <a:srgbClr val="000000">
-                <a:alpha val="38000"/>
+                <a:alpha val="63000"/>
               </a:srgbClr>
             </a:outerShdw>
           </a:effectLst>
-        </a:effectStyle>
-        <a:effectStyle>
-          <a:effectLst>
-            <a:outerShdw blurRad="40000" dist="23000" dir="5400000" rotWithShape="0">
-              <a:srgbClr val="000000">
-                <a:alpha val="35000"/>
-              </a:srgbClr>
-            </a:outerShdw>
-          </a:effectLst>
-        </a:effectStyle>
-        <a:effectStyle>
-          <a:effectLst>
-            <a:outerShdw blurRad="40000" dist="23000" dir="5400000" rotWithShape="0">
-              <a:srgbClr val="000000">
-                <a:alpha val="35000"/>
-              </a:srgbClr>
-            </a:outerShdw>
-          </a:effectLst>
-          <a:scene3d>
-            <a:camera prst="orthographicFront">
-              <a:rot lat="0" lon="0" rev="0"/>
-            </a:camera>
-            <a:lightRig rig="threePt" dir="t">
-              <a:rot lat="0" lon="0" rev="1200000"/>
-            </a:lightRig>
-          </a:scene3d>
-          <a:sp3d>
-            <a:bevelT w="63500" h="25400"/>
-          </a:sp3d>
         </a:effectStyle>
       </a:effectStyleLst>
       <a:bgFillStyleLst>
         <a:solidFill>
           <a:schemeClr val="phClr"/>
         </a:solidFill>
+        <a:solidFill>
+          <a:schemeClr val="phClr">
+            <a:tint val="95000"/>
+            <a:satMod val="170000"/>
+          </a:schemeClr>
+        </a:solidFill>
         <a:gradFill rotWithShape="1">
           <a:gsLst>
             <a:gs pos="0">
               <a:schemeClr val="phClr">
-                <a:tint val="40000"/>
-                <a:satMod val="350000"/>
+                <a:tint val="93000"/>
+                <a:satMod val="150000"/>
+                <a:shade val="98000"/>
+                <a:lumMod val="102000"/>
               </a:schemeClr>
             </a:gs>
-            <a:gs pos="40000">
+            <a:gs pos="50000">
               <a:schemeClr val="phClr">
-                <a:tint val="45000"/>
-                <a:shade val="99000"/>
-                <a:satMod val="350000"/>
+                <a:tint val="98000"/>
+                <a:satMod val="130000"/>
+                <a:shade val="90000"/>
+                <a:lumMod val="103000"/>
               </a:schemeClr>
             </a:gs>
             <a:gs pos="100000">
               <a:schemeClr val="phClr">
-                <a:shade val="20000"/>
-                <a:satMod val="255000"/>
+                <a:shade val="63000"/>
+                <a:satMod val="120000"/>
               </a:schemeClr>
             </a:gs>
           </a:gsLst>
-          <a:path path="circle">
-            <a:fillToRect l="50000" t="-80000" r="50000" b="180000"/>
-          </a:path>
-        </a:gradFill>
-        <a:gradFill rotWithShape="1">
-          <a:gsLst>
-            <a:gs pos="0">
-              <a:schemeClr val="phClr">
-                <a:tint val="80000"/>
-                <a:satMod val="300000"/>
-              </a:schemeClr>
-            </a:gs>
-            <a:gs pos="100000">
-              <a:schemeClr val="phClr">
-                <a:shade val="30000"/>
-                <a:satMod val="200000"/>
-              </a:schemeClr>
-            </a:gs>
-          </a:gsLst>
-          <a:path path="circle">
-            <a:fillToRect l="50000" t="50000" r="50000" b="50000"/>
-          </a:path>
+          <a:lin ang="5400000" scaled="0"/>
         </a:gradFill>
       </a:bgFillStyleLst>
     </a:fmtScheme>
   </a:themeElements>
   <a:objectDefaults>
-    <a:spDef>
-      <a:spPr/>
-      <a:bodyPr/>
-      <a:lstStyle/>
-      <a:style>
-        <a:lnRef idx="1">
-          <a:schemeClr val="accent1"/>
-        </a:lnRef>
-        <a:fillRef idx="3">
-          <a:schemeClr val="accent1"/>
-        </a:fillRef>
-        <a:effectRef idx="2">
-          <a:schemeClr val="accent1"/>
-        </a:effectRef>
-        <a:fontRef idx="minor">
-          <a:schemeClr val="lt1"/>
-        </a:fontRef>
-      </a:style>
-    </a:spDef>
     <a:lnDef>
       <a:spPr/>
       <a:bodyPr/>
@@ -13023,5 +12942,10 @@
     </a:lnDef>
   </a:objectDefaults>
   <a:extraClrSchemeLst/>
+  <a:extLst>
+    <a:ext uri="{05A4C25C-085E-4340-85A3-A5531E510DB2}">
+      <thm15:themeFamily xmlns:thm15="http://schemas.microsoft.com/office/thememl/2012/main" name="Office Theme" id="{2E142A2C-CD16-42D6-873A-C26D2A0506FA}" vid="{1BDDFF52-6CD6-40A5-AB3C-68EB2F1E4D0A}"/>
+    </a:ext>
+  </a:extLst>
 </a:theme>
 </file>